--- a/outputs/styled_preview/deck.pptx
+++ b/outputs/styled_preview/deck.pptx
@@ -566,6 +566,12 @@
         </c:txPr>
         <c:crossAx val="100000001"/>
       </c:valAx>
+      <c:spPr>
+        <a:noFill/>
+        <a:ln>
+          <a:noFill/>
+        </a:ln>
+      </c:spPr>
     </c:plotArea>
     <c:legend>
       <c:legendPos val="b"/>
@@ -589,6 +595,12 @@
     </c:legend>
     <c:dispBlanksAs val="gap"/>
   </c:chart>
+  <c:spPr>
+    <a:noFill/>
+    <a:ln>
+      <a:noFill/>
+    </a:ln>
+  </c:spPr>
   <c:txPr>
     <a:bodyPr/>
     <a:lstStyle/>
@@ -660,6 +672,14 @@
               </c:strCache>
             </c:strRef>
           </c:tx>
+          <c:spPr>
+            <a:solidFill>
+              <a:srgbClr val="C12026"/>
+            </a:solidFill>
+            <a:ln>
+              <a:noFill/>
+            </a:ln>
+          </c:spPr>
           <c:dPt>
             <c:idx val="0"/>
             <c:spPr>
@@ -952,9 +972,21 @@
         <c:crossAx val="-2068027336"/>
         <c:crosses val="autoZero"/>
       </c:valAx>
+      <c:spPr>
+        <a:noFill/>
+        <a:ln>
+          <a:noFill/>
+        </a:ln>
+      </c:spPr>
     </c:plotArea>
     <c:dispBlanksAs val="gap"/>
   </c:chart>
+  <c:spPr>
+    <a:noFill/>
+    <a:ln>
+      <a:noFill/>
+    </a:ln>
+  </c:spPr>
   <c:txPr>
     <a:bodyPr/>
     <a:lstStyle/>
@@ -1026,6 +1058,14 @@
               </c:strCache>
             </c:strRef>
           </c:tx>
+          <c:spPr>
+            <a:solidFill>
+              <a:srgbClr val="C12026"/>
+            </a:solidFill>
+            <a:ln>
+              <a:noFill/>
+            </a:ln>
+          </c:spPr>
           <c:dPt>
             <c:idx val="0"/>
             <c:spPr>
@@ -1318,9 +1358,21 @@
         <c:crossAx val="-2068027336"/>
         <c:crosses val="autoZero"/>
       </c:valAx>
+      <c:spPr>
+        <a:noFill/>
+        <a:ln>
+          <a:noFill/>
+        </a:ln>
+      </c:spPr>
     </c:plotArea>
     <c:dispBlanksAs val="gap"/>
   </c:chart>
+  <c:spPr>
+    <a:noFill/>
+    <a:ln>
+      <a:noFill/>
+    </a:ln>
+  </c:spPr>
   <c:txPr>
     <a:bodyPr/>
     <a:lstStyle/>
@@ -1708,6 +1760,12 @@
         <c:crossAx val="2118791784"/>
         <c:crosses val="autoZero"/>
       </c:valAx>
+      <c:spPr>
+        <a:noFill/>
+        <a:ln>
+          <a:noFill/>
+        </a:ln>
+      </c:spPr>
     </c:plotArea>
     <c:legend>
       <c:legendPos val="b"/>
@@ -1734,6 +1792,12 @@
     <c:dispBlanksAs val="gap"/>
     <c:showDLblsOverMax val="0"/>
   </c:chart>
+  <c:spPr>
+    <a:noFill/>
+    <a:ln>
+      <a:noFill/>
+    </a:ln>
+  </c:spPr>
   <c:txPr>
     <a:bodyPr/>
     <a:lstStyle/>
@@ -1803,6 +1867,14 @@
               </c:strCache>
             </c:strRef>
           </c:tx>
+          <c:spPr>
+            <a:solidFill>
+              <a:srgbClr val="C12026"/>
+            </a:solidFill>
+            <a:ln>
+              <a:noFill/>
+            </a:ln>
+          </c:spPr>
           <c:dPt>
             <c:idx val="0"/>
             <c:spPr>
@@ -2039,6 +2111,12 @@
           <c:showLeaderLines val="1"/>
         </c:dLbls>
       </c:pieChart>
+      <c:spPr>
+        <a:noFill/>
+        <a:ln>
+          <a:noFill/>
+        </a:ln>
+      </c:spPr>
     </c:plotArea>
     <c:legend>
       <c:legendPos/>
@@ -2062,6 +2140,12 @@
     </c:legend>
     <c:dispBlanksAs val="gap"/>
   </c:chart>
+  <c:spPr>
+    <a:noFill/>
+    <a:ln>
+      <a:noFill/>
+    </a:ln>
+  </c:spPr>
   <c:txPr>
     <a:bodyPr/>
     <a:lstStyle/>
@@ -2491,6 +2575,12 @@
         <c:crossAx val="2118791784"/>
         <c:crosses val="autoZero"/>
       </c:valAx>
+      <c:spPr>
+        <a:noFill/>
+        <a:ln>
+          <a:noFill/>
+        </a:ln>
+      </c:spPr>
     </c:plotArea>
     <c:legend>
       <c:legendPos val="b"/>
@@ -2517,6 +2607,12 @@
     <c:dispBlanksAs val="gap"/>
     <c:showDLblsOverMax val="0"/>
   </c:chart>
+  <c:spPr>
+    <a:noFill/>
+    <a:ln>
+      <a:noFill/>
+    </a:ln>
+  </c:spPr>
   <c:txPr>
     <a:bodyPr/>
     <a:lstStyle/>
@@ -2588,6 +2684,14 @@
               </c:strCache>
             </c:strRef>
           </c:tx>
+          <c:spPr>
+            <a:solidFill>
+              <a:srgbClr val="C12026"/>
+            </a:solidFill>
+            <a:ln>
+              <a:noFill/>
+            </a:ln>
+          </c:spPr>
           <c:dPt>
             <c:idx val="0"/>
             <c:spPr>
@@ -3314,9 +3418,21 @@
         <c:crossAx val="-2068027336"/>
         <c:crosses val="autoZero"/>
       </c:valAx>
+      <c:spPr>
+        <a:noFill/>
+        <a:ln>
+          <a:noFill/>
+        </a:ln>
+      </c:spPr>
     </c:plotArea>
     <c:dispBlanksAs val="gap"/>
   </c:chart>
+  <c:spPr>
+    <a:noFill/>
+    <a:ln>
+      <a:noFill/>
+    </a:ln>
+  </c:spPr>
   <c:txPr>
     <a:bodyPr/>
     <a:lstStyle/>
@@ -7558,20 +7674,6 @@
           </a:ln>
           <a:effectLst/>
         </p:spPr>
-        <p:style>
-          <a:lnRef idx="1">
-            <a:schemeClr val="accent1"/>
-          </a:lnRef>
-          <a:fillRef idx="3">
-            <a:schemeClr val="accent1"/>
-          </a:fillRef>
-          <a:effectRef idx="2">
-            <a:schemeClr val="accent1"/>
-          </a:effectRef>
-          <a:fontRef idx="minor">
-            <a:schemeClr val="lt1"/>
-          </a:fontRef>
-        </p:style>
         <p:txBody>
           <a:bodyPr rtlCol="0" anchor="ctr"/>
           <a:lstStyle/>
@@ -7602,20 +7704,6 @@
           </a:ln>
           <a:effectLst/>
         </p:spPr>
-        <p:style>
-          <a:lnRef idx="1">
-            <a:schemeClr val="accent1"/>
-          </a:lnRef>
-          <a:fillRef idx="3">
-            <a:schemeClr val="accent1"/>
-          </a:fillRef>
-          <a:effectRef idx="2">
-            <a:schemeClr val="accent1"/>
-          </a:effectRef>
-          <a:fontRef idx="minor">
-            <a:schemeClr val="lt1"/>
-          </a:fontRef>
-        </p:style>
         <p:txBody>
           <a:bodyPr rtlCol="0" anchor="ctr" wrap="square" lIns="175260"/>
           <a:lstStyle/>
@@ -7782,20 +7870,6 @@
           </a:ln>
           <a:effectLst/>
         </p:spPr>
-        <p:style>
-          <a:lnRef idx="1">
-            <a:schemeClr val="accent1"/>
-          </a:lnRef>
-          <a:fillRef idx="3">
-            <a:schemeClr val="accent1"/>
-          </a:fillRef>
-          <a:effectRef idx="2">
-            <a:schemeClr val="accent1"/>
-          </a:effectRef>
-          <a:fontRef idx="minor">
-            <a:schemeClr val="lt1"/>
-          </a:fontRef>
-        </p:style>
         <p:txBody>
           <a:bodyPr rtlCol="0" anchor="ctr"/>
           <a:lstStyle/>
@@ -8084,20 +8158,6 @@
           </a:ln>
           <a:effectLst/>
         </p:spPr>
-        <p:style>
-          <a:lnRef idx="1">
-            <a:schemeClr val="accent1"/>
-          </a:lnRef>
-          <a:fillRef idx="3">
-            <a:schemeClr val="accent1"/>
-          </a:fillRef>
-          <a:effectRef idx="2">
-            <a:schemeClr val="accent1"/>
-          </a:effectRef>
-          <a:fontRef idx="minor">
-            <a:schemeClr val="lt1"/>
-          </a:fontRef>
-        </p:style>
         <p:txBody>
           <a:bodyPr rtlCol="0" anchor="ctr"/>
           <a:lstStyle/>
@@ -8128,20 +8188,6 @@
           </a:ln>
           <a:effectLst/>
         </p:spPr>
-        <p:style>
-          <a:lnRef idx="1">
-            <a:schemeClr val="accent1"/>
-          </a:lnRef>
-          <a:fillRef idx="3">
-            <a:schemeClr val="accent1"/>
-          </a:fillRef>
-          <a:effectRef idx="2">
-            <a:schemeClr val="accent1"/>
-          </a:effectRef>
-          <a:fontRef idx="minor">
-            <a:schemeClr val="lt1"/>
-          </a:fontRef>
-        </p:style>
         <p:txBody>
           <a:bodyPr rtlCol="0" anchor="ctr" wrap="square" lIns="175260"/>
           <a:lstStyle/>
@@ -8308,20 +8354,6 @@
           </a:ln>
           <a:effectLst/>
         </p:spPr>
-        <p:style>
-          <a:lnRef idx="1">
-            <a:schemeClr val="accent1"/>
-          </a:lnRef>
-          <a:fillRef idx="3">
-            <a:schemeClr val="accent1"/>
-          </a:fillRef>
-          <a:effectRef idx="2">
-            <a:schemeClr val="accent1"/>
-          </a:effectRef>
-          <a:fontRef idx="minor">
-            <a:schemeClr val="lt1"/>
-          </a:fontRef>
-        </p:style>
         <p:txBody>
           <a:bodyPr rtlCol="0" anchor="ctr"/>
           <a:lstStyle/>
@@ -8610,20 +8642,6 @@
           </a:ln>
           <a:effectLst/>
         </p:spPr>
-        <p:style>
-          <a:lnRef idx="1">
-            <a:schemeClr val="accent1"/>
-          </a:lnRef>
-          <a:fillRef idx="3">
-            <a:schemeClr val="accent1"/>
-          </a:fillRef>
-          <a:effectRef idx="2">
-            <a:schemeClr val="accent1"/>
-          </a:effectRef>
-          <a:fontRef idx="minor">
-            <a:schemeClr val="lt1"/>
-          </a:fontRef>
-        </p:style>
         <p:txBody>
           <a:bodyPr rtlCol="0" anchor="ctr"/>
           <a:lstStyle/>
@@ -8654,20 +8672,6 @@
           </a:ln>
           <a:effectLst/>
         </p:spPr>
-        <p:style>
-          <a:lnRef idx="1">
-            <a:schemeClr val="accent1"/>
-          </a:lnRef>
-          <a:fillRef idx="3">
-            <a:schemeClr val="accent1"/>
-          </a:fillRef>
-          <a:effectRef idx="2">
-            <a:schemeClr val="accent1"/>
-          </a:effectRef>
-          <a:fontRef idx="minor">
-            <a:schemeClr val="lt1"/>
-          </a:fontRef>
-        </p:style>
         <p:txBody>
           <a:bodyPr rtlCol="0" anchor="ctr" wrap="square" lIns="175260"/>
           <a:lstStyle/>
@@ -8713,8 +8717,8 @@
         <a:graphic>
           <a:graphicData uri="http://schemas.openxmlformats.org/drawingml/2006/table">
             <a:tbl>
-              <a:tblPr firstRow="1" bandRow="1">
-                <a:tableStyleId>{5C22544A-7EE6-4342-B048-85BDC9FD1C3A}</a:tableStyleId>
+              <a:tblPr>
+                <a:tableStyleId>{2D5ABB26-0587-4C30-8999-92F81FD0307C}</a:tableStyleId>
               </a:tblPr>
               <a:tblGrid>
                 <a:gridCol w="944048"/>
@@ -8745,6 +8749,11 @@
                     </a:p>
                   </a:txBody>
                   <a:tcPr>
+                    <a:lnB w="19050" cap="flat" cmpd="sng" algn="ctr">
+                      <a:solidFill>
+                        <a:srgbClr val="C12026"/>
+                      </a:solidFill>
+                    </a:lnB>
                     <a:solidFill>
                       <a:srgbClr val="262626"/>
                     </a:solidFill>
@@ -8769,6 +8778,11 @@
                     </a:p>
                   </a:txBody>
                   <a:tcPr>
+                    <a:lnB w="19050" cap="flat" cmpd="sng" algn="ctr">
+                      <a:solidFill>
+                        <a:srgbClr val="C12026"/>
+                      </a:solidFill>
+                    </a:lnB>
                     <a:solidFill>
                       <a:srgbClr val="262626"/>
                     </a:solidFill>
@@ -8793,6 +8807,11 @@
                     </a:p>
                   </a:txBody>
                   <a:tcPr>
+                    <a:lnB w="19050" cap="flat" cmpd="sng" algn="ctr">
+                      <a:solidFill>
+                        <a:srgbClr val="C12026"/>
+                      </a:solidFill>
+                    </a:lnB>
                     <a:solidFill>
                       <a:srgbClr val="262626"/>
                     </a:solidFill>
@@ -8817,6 +8836,11 @@
                     </a:p>
                   </a:txBody>
                   <a:tcPr>
+                    <a:lnB w="19050" cap="flat" cmpd="sng" algn="ctr">
+                      <a:solidFill>
+                        <a:srgbClr val="C12026"/>
+                      </a:solidFill>
+                    </a:lnB>
                     <a:solidFill>
                       <a:srgbClr val="262626"/>
                     </a:solidFill>
@@ -8841,6 +8865,11 @@
                     </a:p>
                   </a:txBody>
                   <a:tcPr>
+                    <a:lnB w="19050" cap="flat" cmpd="sng" algn="ctr">
+                      <a:solidFill>
+                        <a:srgbClr val="C12026"/>
+                      </a:solidFill>
+                    </a:lnB>
                     <a:solidFill>
                       <a:srgbClr val="262626"/>
                     </a:solidFill>
@@ -8865,6 +8894,11 @@
                     </a:p>
                   </a:txBody>
                   <a:tcPr>
+                    <a:lnB w="19050" cap="flat" cmpd="sng" algn="ctr">
+                      <a:solidFill>
+                        <a:srgbClr val="C12026"/>
+                      </a:solidFill>
+                    </a:lnB>
                     <a:solidFill>
                       <a:srgbClr val="262626"/>
                     </a:solidFill>
@@ -8889,6 +8923,11 @@
                     </a:p>
                   </a:txBody>
                   <a:tcPr>
+                    <a:lnB w="19050" cap="flat" cmpd="sng" algn="ctr">
+                      <a:solidFill>
+                        <a:srgbClr val="C12026"/>
+                      </a:solidFill>
+                    </a:lnB>
                     <a:solidFill>
                       <a:srgbClr val="262626"/>
                     </a:solidFill>
@@ -8914,7 +8953,16 @@
                       </a:r>
                     </a:p>
                   </a:txBody>
-                  <a:tcPr/>
+                  <a:tcPr>
+                    <a:lnB w="9525" cap="flat" cmpd="sng" algn="ctr">
+                      <a:solidFill>
+                        <a:srgbClr val="D9D9D9"/>
+                      </a:solidFill>
+                    </a:lnB>
+                    <a:solidFill>
+                      <a:srgbClr val="FFFFFF"/>
+                    </a:solidFill>
+                  </a:tcPr>
                 </a:tc>
                 <a:tc>
                   <a:txBody>
@@ -8935,6 +8983,11 @@
                     </a:p>
                   </a:txBody>
                   <a:tcPr>
+                    <a:lnB w="9525" cap="flat" cmpd="sng" algn="ctr">
+                      <a:solidFill>
+                        <a:srgbClr val="D9D9D9"/>
+                      </a:solidFill>
+                    </a:lnB>
                     <a:solidFill>
                       <a:srgbClr val="C8383D"/>
                     </a:solidFill>
@@ -8959,6 +9012,11 @@
                     </a:p>
                   </a:txBody>
                   <a:tcPr>
+                    <a:lnB w="9525" cap="flat" cmpd="sng" algn="ctr">
+                      <a:solidFill>
+                        <a:srgbClr val="D9D9D9"/>
+                      </a:solidFill>
+                    </a:lnB>
                     <a:solidFill>
                       <a:srgbClr val="CE4D52"/>
                     </a:solidFill>
@@ -8983,6 +9041,11 @@
                     </a:p>
                   </a:txBody>
                   <a:tcPr>
+                    <a:lnB w="9525" cap="flat" cmpd="sng" algn="ctr">
+                      <a:solidFill>
+                        <a:srgbClr val="D9D9D9"/>
+                      </a:solidFill>
+                    </a:lnB>
                     <a:solidFill>
                       <a:srgbClr val="C7373C"/>
                     </a:solidFill>
@@ -9007,6 +9070,11 @@
                     </a:p>
                   </a:txBody>
                   <a:tcPr>
+                    <a:lnB w="9525" cap="flat" cmpd="sng" algn="ctr">
+                      <a:solidFill>
+                        <a:srgbClr val="D9D9D9"/>
+                      </a:solidFill>
+                    </a:lnB>
                     <a:solidFill>
                       <a:srgbClr val="C22228"/>
                     </a:solidFill>
@@ -9031,6 +9099,11 @@
                     </a:p>
                   </a:txBody>
                   <a:tcPr>
+                    <a:lnB w="9525" cap="flat" cmpd="sng" algn="ctr">
+                      <a:solidFill>
+                        <a:srgbClr val="D9D9D9"/>
+                      </a:solidFill>
+                    </a:lnB>
                     <a:solidFill>
                       <a:srgbClr val="C83B40"/>
                     </a:solidFill>
@@ -9055,6 +9128,11 @@
                     </a:p>
                   </a:txBody>
                   <a:tcPr>
+                    <a:lnB w="9525" cap="flat" cmpd="sng" algn="ctr">
+                      <a:solidFill>
+                        <a:srgbClr val="D9D9D9"/>
+                      </a:solidFill>
+                    </a:lnB>
                     <a:solidFill>
                       <a:srgbClr val="C42A30"/>
                     </a:solidFill>
@@ -9080,7 +9158,16 @@
                       </a:r>
                     </a:p>
                   </a:txBody>
-                  <a:tcPr/>
+                  <a:tcPr>
+                    <a:lnB w="9525" cap="flat" cmpd="sng" algn="ctr">
+                      <a:solidFill>
+                        <a:srgbClr val="D9D9D9"/>
+                      </a:solidFill>
+                    </a:lnB>
+                    <a:solidFill>
+                      <a:srgbClr val="FFFFFF"/>
+                    </a:solidFill>
+                  </a:tcPr>
                 </a:tc>
                 <a:tc>
                   <a:txBody>
@@ -9101,6 +9188,11 @@
                     </a:p>
                   </a:txBody>
                   <a:tcPr>
+                    <a:lnB w="9525" cap="flat" cmpd="sng" algn="ctr">
+                      <a:solidFill>
+                        <a:srgbClr val="D9D9D9"/>
+                      </a:solidFill>
+                    </a:lnB>
                     <a:solidFill>
                       <a:srgbClr val="C52F35"/>
                     </a:solidFill>
@@ -9125,6 +9217,11 @@
                     </a:p>
                   </a:txBody>
                   <a:tcPr>
+                    <a:lnB w="9525" cap="flat" cmpd="sng" algn="ctr">
+                      <a:solidFill>
+                        <a:srgbClr val="D9D9D9"/>
+                      </a:solidFill>
+                    </a:lnB>
                     <a:solidFill>
                       <a:srgbClr val="C63137"/>
                     </a:solidFill>
@@ -9149,6 +9246,11 @@
                     </a:p>
                   </a:txBody>
                   <a:tcPr>
+                    <a:lnB w="9525" cap="flat" cmpd="sng" algn="ctr">
+                      <a:solidFill>
+                        <a:srgbClr val="D9D9D9"/>
+                      </a:solidFill>
+                    </a:lnB>
                     <a:solidFill>
                       <a:srgbClr val="C3282E"/>
                     </a:solidFill>
@@ -9173,6 +9275,11 @@
                     </a:p>
                   </a:txBody>
                   <a:tcPr>
+                    <a:lnB w="9525" cap="flat" cmpd="sng" algn="ctr">
+                      <a:solidFill>
+                        <a:srgbClr val="D9D9D9"/>
+                      </a:solidFill>
+                    </a:lnB>
                     <a:solidFill>
                       <a:srgbClr val="C12026"/>
                     </a:solidFill>
@@ -9197,6 +9304,11 @@
                     </a:p>
                   </a:txBody>
                   <a:tcPr>
+                    <a:lnB w="9525" cap="flat" cmpd="sng" algn="ctr">
+                      <a:solidFill>
+                        <a:srgbClr val="D9D9D9"/>
+                      </a:solidFill>
+                    </a:lnB>
                     <a:solidFill>
                       <a:srgbClr val="C4292F"/>
                     </a:solidFill>
@@ -9221,6 +9333,11 @@
                     </a:p>
                   </a:txBody>
                   <a:tcPr>
+                    <a:lnB w="9525" cap="flat" cmpd="sng" algn="ctr">
+                      <a:solidFill>
+                        <a:srgbClr val="D9D9D9"/>
+                      </a:solidFill>
+                    </a:lnB>
                     <a:solidFill>
                       <a:srgbClr val="C42B31"/>
                     </a:solidFill>
@@ -9246,7 +9363,16 @@
                       </a:r>
                     </a:p>
                   </a:txBody>
-                  <a:tcPr/>
+                  <a:tcPr>
+                    <a:lnB w="9525" cap="flat" cmpd="sng" algn="ctr">
+                      <a:solidFill>
+                        <a:srgbClr val="D9D9D9"/>
+                      </a:solidFill>
+                    </a:lnB>
+                    <a:solidFill>
+                      <a:srgbClr val="FFFFFF"/>
+                    </a:solidFill>
+                  </a:tcPr>
                 </a:tc>
                 <a:tc>
                   <a:txBody>
@@ -9267,6 +9393,11 @@
                     </a:p>
                   </a:txBody>
                   <a:tcPr>
+                    <a:lnB w="9525" cap="flat" cmpd="sng" algn="ctr">
+                      <a:solidFill>
+                        <a:srgbClr val="D9D9D9"/>
+                      </a:solidFill>
+                    </a:lnB>
                     <a:solidFill>
                       <a:srgbClr val="C8393E"/>
                     </a:solidFill>
@@ -9291,6 +9422,11 @@
                     </a:p>
                   </a:txBody>
                   <a:tcPr>
+                    <a:lnB w="9525" cap="flat" cmpd="sng" algn="ctr">
+                      <a:solidFill>
+                        <a:srgbClr val="D9D9D9"/>
+                      </a:solidFill>
+                    </a:lnB>
                     <a:solidFill>
                       <a:srgbClr val="CA3F44"/>
                     </a:solidFill>
@@ -9315,6 +9451,11 @@
                     </a:p>
                   </a:txBody>
                   <a:tcPr>
+                    <a:lnB w="9525" cap="flat" cmpd="sng" algn="ctr">
+                      <a:solidFill>
+                        <a:srgbClr val="D9D9D9"/>
+                      </a:solidFill>
+                    </a:lnB>
                     <a:solidFill>
                       <a:srgbClr val="C93C41"/>
                     </a:solidFill>
@@ -9339,6 +9480,11 @@
                     </a:p>
                   </a:txBody>
                   <a:tcPr>
+                    <a:lnB w="9525" cap="flat" cmpd="sng" algn="ctr">
+                      <a:solidFill>
+                        <a:srgbClr val="D9D9D9"/>
+                      </a:solidFill>
+                    </a:lnB>
                     <a:solidFill>
                       <a:srgbClr val="C7373D"/>
                     </a:solidFill>
@@ -9363,6 +9509,11 @@
                     </a:p>
                   </a:txBody>
                   <a:tcPr>
+                    <a:lnB w="9525" cap="flat" cmpd="sng" algn="ctr">
+                      <a:solidFill>
+                        <a:srgbClr val="D9D9D9"/>
+                      </a:solidFill>
+                    </a:lnB>
                     <a:solidFill>
                       <a:srgbClr val="C3282D"/>
                     </a:solidFill>
@@ -9387,6 +9538,11 @@
                     </a:p>
                   </a:txBody>
                   <a:tcPr>
+                    <a:lnB w="9525" cap="flat" cmpd="sng" algn="ctr">
+                      <a:solidFill>
+                        <a:srgbClr val="D9D9D9"/>
+                      </a:solidFill>
+                    </a:lnB>
                     <a:solidFill>
                       <a:srgbClr val="C63036"/>
                     </a:solidFill>
@@ -9412,7 +9568,16 @@
                       </a:r>
                     </a:p>
                   </a:txBody>
-                  <a:tcPr/>
+                  <a:tcPr>
+                    <a:lnB w="9525" cap="flat" cmpd="sng" algn="ctr">
+                      <a:solidFill>
+                        <a:srgbClr val="D9D9D9"/>
+                      </a:solidFill>
+                    </a:lnB>
+                    <a:solidFill>
+                      <a:srgbClr val="FFFFFF"/>
+                    </a:solidFill>
+                  </a:tcPr>
                 </a:tc>
                 <a:tc>
                   <a:txBody>
@@ -9433,6 +9598,11 @@
                     </a:p>
                   </a:txBody>
                   <a:tcPr>
+                    <a:lnB w="9525" cap="flat" cmpd="sng" algn="ctr">
+                      <a:solidFill>
+                        <a:srgbClr val="D9D9D9"/>
+                      </a:solidFill>
+                    </a:lnB>
                     <a:solidFill>
                       <a:srgbClr val="C93C42"/>
                     </a:solidFill>
@@ -9457,6 +9627,11 @@
                     </a:p>
                   </a:txBody>
                   <a:tcPr>
+                    <a:lnB w="9525" cap="flat" cmpd="sng" algn="ctr">
+                      <a:solidFill>
+                        <a:srgbClr val="D9D9D9"/>
+                      </a:solidFill>
+                    </a:lnB>
                     <a:solidFill>
                       <a:srgbClr val="C83B40"/>
                     </a:solidFill>
@@ -9481,6 +9656,11 @@
                     </a:p>
                   </a:txBody>
                   <a:tcPr>
+                    <a:lnB w="9525" cap="flat" cmpd="sng" algn="ctr">
+                      <a:solidFill>
+                        <a:srgbClr val="D9D9D9"/>
+                      </a:solidFill>
+                    </a:lnB>
                     <a:solidFill>
                       <a:srgbClr val="CA4045"/>
                     </a:solidFill>
@@ -9505,6 +9685,11 @@
                     </a:p>
                   </a:txBody>
                   <a:tcPr>
+                    <a:lnB w="9525" cap="flat" cmpd="sng" algn="ctr">
+                      <a:solidFill>
+                        <a:srgbClr val="D9D9D9"/>
+                      </a:solidFill>
+                    </a:lnB>
                     <a:solidFill>
                       <a:srgbClr val="CA4146"/>
                     </a:solidFill>
@@ -9529,6 +9714,11 @@
                     </a:p>
                   </a:txBody>
                   <a:tcPr>
+                    <a:lnB w="9525" cap="flat" cmpd="sng" algn="ctr">
+                      <a:solidFill>
+                        <a:srgbClr val="D9D9D9"/>
+                      </a:solidFill>
+                    </a:lnB>
                     <a:solidFill>
                       <a:srgbClr val="CA4045"/>
                     </a:solidFill>
@@ -9553,6 +9743,11 @@
                     </a:p>
                   </a:txBody>
                   <a:tcPr>
+                    <a:lnB w="9525" cap="flat" cmpd="sng" algn="ctr">
+                      <a:solidFill>
+                        <a:srgbClr val="D9D9D9"/>
+                      </a:solidFill>
+                    </a:lnB>
                     <a:solidFill>
                       <a:srgbClr val="CB4348"/>
                     </a:solidFill>
@@ -9578,7 +9773,16 @@
                       </a:r>
                     </a:p>
                   </a:txBody>
-                  <a:tcPr/>
+                  <a:tcPr>
+                    <a:lnB w="9525" cap="flat" cmpd="sng" algn="ctr">
+                      <a:solidFill>
+                        <a:srgbClr val="D9D9D9"/>
+                      </a:solidFill>
+                    </a:lnB>
+                    <a:solidFill>
+                      <a:srgbClr val="FFFFFF"/>
+                    </a:solidFill>
+                  </a:tcPr>
                 </a:tc>
                 <a:tc>
                   <a:txBody>
@@ -9599,6 +9803,11 @@
                     </a:p>
                   </a:txBody>
                   <a:tcPr>
+                    <a:lnB w="9525" cap="flat" cmpd="sng" algn="ctr">
+                      <a:solidFill>
+                        <a:srgbClr val="D9D9D9"/>
+                      </a:solidFill>
+                    </a:lnB>
                     <a:solidFill>
                       <a:srgbClr val="E08E91"/>
                     </a:solidFill>
@@ -9623,6 +9832,11 @@
                     </a:p>
                   </a:txBody>
                   <a:tcPr>
+                    <a:lnB w="9525" cap="flat" cmpd="sng" algn="ctr">
+                      <a:solidFill>
+                        <a:srgbClr val="D9D9D9"/>
+                      </a:solidFill>
+                    </a:lnB>
                     <a:solidFill>
                       <a:srgbClr val="E19396"/>
                     </a:solidFill>
@@ -9647,6 +9861,11 @@
                     </a:p>
                   </a:txBody>
                   <a:tcPr>
+                    <a:lnB w="9525" cap="flat" cmpd="sng" algn="ctr">
+                      <a:solidFill>
+                        <a:srgbClr val="D9D9D9"/>
+                      </a:solidFill>
+                    </a:lnB>
                     <a:solidFill>
                       <a:srgbClr val="D97579"/>
                     </a:solidFill>
@@ -9671,6 +9890,11 @@
                     </a:p>
                   </a:txBody>
                   <a:tcPr>
+                    <a:lnB w="9525" cap="flat" cmpd="sng" algn="ctr">
+                      <a:solidFill>
+                        <a:srgbClr val="D9D9D9"/>
+                      </a:solidFill>
+                    </a:lnB>
                     <a:solidFill>
                       <a:srgbClr val="E29598"/>
                     </a:solidFill>
@@ -9695,6 +9919,11 @@
                     </a:p>
                   </a:txBody>
                   <a:tcPr>
+                    <a:lnB w="9525" cap="flat" cmpd="sng" algn="ctr">
+                      <a:solidFill>
+                        <a:srgbClr val="D9D9D9"/>
+                      </a:solidFill>
+                    </a:lnB>
                     <a:solidFill>
                       <a:srgbClr val="E29699"/>
                     </a:solidFill>
@@ -9719,6 +9948,11 @@
                     </a:p>
                   </a:txBody>
                   <a:tcPr>
+                    <a:lnB w="9525" cap="flat" cmpd="sng" algn="ctr">
+                      <a:solidFill>
+                        <a:srgbClr val="D9D9D9"/>
+                      </a:solidFill>
+                    </a:lnB>
                     <a:solidFill>
                       <a:srgbClr val="DB7D80"/>
                     </a:solidFill>
@@ -9744,7 +9978,16 @@
                       </a:r>
                     </a:p>
                   </a:txBody>
-                  <a:tcPr/>
+                  <a:tcPr>
+                    <a:lnB w="9525" cap="flat" cmpd="sng" algn="ctr">
+                      <a:solidFill>
+                        <a:srgbClr val="D9D9D9"/>
+                      </a:solidFill>
+                    </a:lnB>
+                    <a:solidFill>
+                      <a:srgbClr val="FFFFFF"/>
+                    </a:solidFill>
+                  </a:tcPr>
                 </a:tc>
                 <a:tc>
                   <a:txBody>
@@ -9765,6 +10008,11 @@
                     </a:p>
                   </a:txBody>
                   <a:tcPr>
+                    <a:lnB w="9525" cap="flat" cmpd="sng" algn="ctr">
+                      <a:solidFill>
+                        <a:srgbClr val="D9D9D9"/>
+                      </a:solidFill>
+                    </a:lnB>
                     <a:solidFill>
                       <a:srgbClr val="E2989B"/>
                     </a:solidFill>
@@ -9789,6 +10037,11 @@
                     </a:p>
                   </a:txBody>
                   <a:tcPr>
+                    <a:lnB w="9525" cap="flat" cmpd="sng" algn="ctr">
+                      <a:solidFill>
+                        <a:srgbClr val="D9D9D9"/>
+                      </a:solidFill>
+                    </a:lnB>
                     <a:solidFill>
                       <a:srgbClr val="E49DA0"/>
                     </a:solidFill>
@@ -9813,6 +10066,11 @@
                     </a:p>
                   </a:txBody>
                   <a:tcPr>
+                    <a:lnB w="9525" cap="flat" cmpd="sng" algn="ctr">
+                      <a:solidFill>
+                        <a:srgbClr val="D9D9D9"/>
+                      </a:solidFill>
+                    </a:lnB>
                     <a:solidFill>
                       <a:srgbClr val="E19497"/>
                     </a:solidFill>
@@ -9837,6 +10095,11 @@
                     </a:p>
                   </a:txBody>
                   <a:tcPr>
+                    <a:lnB w="9525" cap="flat" cmpd="sng" algn="ctr">
+                      <a:solidFill>
+                        <a:srgbClr val="D9D9D9"/>
+                      </a:solidFill>
+                    </a:lnB>
                     <a:solidFill>
                       <a:srgbClr val="E39B9E"/>
                     </a:solidFill>
@@ -9861,6 +10124,11 @@
                     </a:p>
                   </a:txBody>
                   <a:tcPr>
+                    <a:lnB w="9525" cap="flat" cmpd="sng" algn="ctr">
+                      <a:solidFill>
+                        <a:srgbClr val="D9D9D9"/>
+                      </a:solidFill>
+                    </a:lnB>
                     <a:solidFill>
                       <a:srgbClr val="E29698"/>
                     </a:solidFill>
@@ -9885,6 +10153,11 @@
                     </a:p>
                   </a:txBody>
                   <a:tcPr>
+                    <a:lnB w="9525" cap="flat" cmpd="sng" algn="ctr">
+                      <a:solidFill>
+                        <a:srgbClr val="D9D9D9"/>
+                      </a:solidFill>
+                    </a:lnB>
                     <a:solidFill>
                       <a:srgbClr val="E49FA2"/>
                     </a:solidFill>
@@ -9910,27 +10183,12 @@
                       </a:r>
                     </a:p>
                   </a:txBody>
-                  <a:tcPr/>
-                </a:tc>
-                <a:tc>
-                  <a:txBody>
-                    <a:bodyPr/>
-                    <a:lstStyle/>
-                    <a:p>
-                      <a:r>
-                        <a:rPr sz="1100" b="0">
-                          <a:solidFill>
-                            <a:srgbClr val="1A1A1A"/>
-                          </a:solidFill>
-                          <a:latin typeface="微軟正黑體"/>
-                          <a:ea typeface="微軟正黑體"/>
-                          <a:cs typeface="微軟正黑體"/>
-                        </a:rPr>
-                        <a:t>0</a:t>
-                      </a:r>
-                    </a:p>
-                  </a:txBody>
                   <a:tcPr>
+                    <a:lnB w="9525" cap="flat" cmpd="sng" algn="ctr">
+                      <a:solidFill>
+                        <a:srgbClr val="D9D9D9"/>
+                      </a:solidFill>
+                    </a:lnB>
                     <a:solidFill>
                       <a:srgbClr val="FFFFFF"/>
                     </a:solidFill>
@@ -9955,6 +10213,40 @@
                     </a:p>
                   </a:txBody>
                   <a:tcPr>
+                    <a:lnB w="9525" cap="flat" cmpd="sng" algn="ctr">
+                      <a:solidFill>
+                        <a:srgbClr val="D9D9D9"/>
+                      </a:solidFill>
+                    </a:lnB>
+                    <a:solidFill>
+                      <a:srgbClr val="FFFFFF"/>
+                    </a:solidFill>
+                  </a:tcPr>
+                </a:tc>
+                <a:tc>
+                  <a:txBody>
+                    <a:bodyPr/>
+                    <a:lstStyle/>
+                    <a:p>
+                      <a:r>
+                        <a:rPr sz="1100" b="0">
+                          <a:solidFill>
+                            <a:srgbClr val="1A1A1A"/>
+                          </a:solidFill>
+                          <a:latin typeface="微軟正黑體"/>
+                          <a:ea typeface="微軟正黑體"/>
+                          <a:cs typeface="微軟正黑體"/>
+                        </a:rPr>
+                        <a:t>0</a:t>
+                      </a:r>
+                    </a:p>
+                  </a:txBody>
+                  <a:tcPr>
+                    <a:lnB w="9525" cap="flat" cmpd="sng" algn="ctr">
+                      <a:solidFill>
+                        <a:srgbClr val="D9D9D9"/>
+                      </a:solidFill>
+                    </a:lnB>
                     <a:solidFill>
                       <a:srgbClr val="FFFFFF"/>
                     </a:solidFill>
@@ -9979,6 +10271,11 @@
                     </a:p>
                   </a:txBody>
                   <a:tcPr>
+                    <a:lnB w="9525" cap="flat" cmpd="sng" algn="ctr">
+                      <a:solidFill>
+                        <a:srgbClr val="D9D9D9"/>
+                      </a:solidFill>
+                    </a:lnB>
                     <a:solidFill>
                       <a:srgbClr val="F0C9CB"/>
                     </a:solidFill>
@@ -10003,6 +10300,11 @@
                     </a:p>
                   </a:txBody>
                   <a:tcPr>
+                    <a:lnB w="9525" cap="flat" cmpd="sng" algn="ctr">
+                      <a:solidFill>
+                        <a:srgbClr val="D9D9D9"/>
+                      </a:solidFill>
+                    </a:lnB>
                     <a:solidFill>
                       <a:srgbClr val="FFFFFF"/>
                     </a:solidFill>
@@ -10027,6 +10329,11 @@
                     </a:p>
                   </a:txBody>
                   <a:tcPr>
+                    <a:lnB w="9525" cap="flat" cmpd="sng" algn="ctr">
+                      <a:solidFill>
+                        <a:srgbClr val="D9D9D9"/>
+                      </a:solidFill>
+                    </a:lnB>
                     <a:solidFill>
                       <a:srgbClr val="FFFFFF"/>
                     </a:solidFill>
@@ -10051,6 +10358,11 @@
                     </a:p>
                   </a:txBody>
                   <a:tcPr>
+                    <a:lnB w="9525" cap="flat" cmpd="sng" algn="ctr">
+                      <a:solidFill>
+                        <a:srgbClr val="D9D9D9"/>
+                      </a:solidFill>
+                    </a:lnB>
                     <a:solidFill>
                       <a:srgbClr val="EDBDBE"/>
                     </a:solidFill>
@@ -10076,7 +10388,16 @@
                       </a:r>
                     </a:p>
                   </a:txBody>
-                  <a:tcPr/>
+                  <a:tcPr>
+                    <a:lnB w="9525" cap="flat" cmpd="sng" algn="ctr">
+                      <a:solidFill>
+                        <a:srgbClr val="D9D9D9"/>
+                      </a:solidFill>
+                    </a:lnB>
+                    <a:solidFill>
+                      <a:srgbClr val="FFFFFF"/>
+                    </a:solidFill>
+                  </a:tcPr>
                 </a:tc>
                 <a:tc>
                   <a:txBody>
@@ -10097,6 +10418,11 @@
                     </a:p>
                   </a:txBody>
                   <a:tcPr>
+                    <a:lnB w="9525" cap="flat" cmpd="sng" algn="ctr">
+                      <a:solidFill>
+                        <a:srgbClr val="D9D9D9"/>
+                      </a:solidFill>
+                    </a:lnB>
                     <a:solidFill>
                       <a:srgbClr val="F0CACC"/>
                     </a:solidFill>
@@ -10121,6 +10447,11 @@
                     </a:p>
                   </a:txBody>
                   <a:tcPr>
+                    <a:lnB w="9525" cap="flat" cmpd="sng" algn="ctr">
+                      <a:solidFill>
+                        <a:srgbClr val="D9D9D9"/>
+                      </a:solidFill>
+                    </a:lnB>
                     <a:solidFill>
                       <a:srgbClr val="F1CCCD"/>
                     </a:solidFill>
@@ -10145,6 +10476,11 @@
                     </a:p>
                   </a:txBody>
                   <a:tcPr>
+                    <a:lnB w="9525" cap="flat" cmpd="sng" algn="ctr">
+                      <a:solidFill>
+                        <a:srgbClr val="D9D9D9"/>
+                      </a:solidFill>
+                    </a:lnB>
                     <a:solidFill>
                       <a:srgbClr val="F0C8C9"/>
                     </a:solidFill>
@@ -10169,6 +10505,11 @@
                     </a:p>
                   </a:txBody>
                   <a:tcPr>
+                    <a:lnB w="9525" cap="flat" cmpd="sng" algn="ctr">
+                      <a:solidFill>
+                        <a:srgbClr val="D9D9D9"/>
+                      </a:solidFill>
+                    </a:lnB>
                     <a:solidFill>
                       <a:srgbClr val="EEC1C3"/>
                     </a:solidFill>
@@ -10193,6 +10534,11 @@
                     </a:p>
                   </a:txBody>
                   <a:tcPr>
+                    <a:lnB w="9525" cap="flat" cmpd="sng" algn="ctr">
+                      <a:solidFill>
+                        <a:srgbClr val="D9D9D9"/>
+                      </a:solidFill>
+                    </a:lnB>
                     <a:solidFill>
                       <a:srgbClr val="EEC1C3"/>
                     </a:solidFill>
@@ -10217,6 +10563,11 @@
                     </a:p>
                   </a:txBody>
                   <a:tcPr>
+                    <a:lnB w="9525" cap="flat" cmpd="sng" algn="ctr">
+                      <a:solidFill>
+                        <a:srgbClr val="D9D9D9"/>
+                      </a:solidFill>
+                    </a:lnB>
                     <a:solidFill>
                       <a:srgbClr val="EDC0C1"/>
                     </a:solidFill>
@@ -10242,7 +10593,16 @@
                       </a:r>
                     </a:p>
                   </a:txBody>
-                  <a:tcPr/>
+                  <a:tcPr>
+                    <a:lnB w="9525" cap="flat" cmpd="sng" algn="ctr">
+                      <a:solidFill>
+                        <a:srgbClr val="D9D9D9"/>
+                      </a:solidFill>
+                    </a:lnB>
+                    <a:solidFill>
+                      <a:srgbClr val="FFFFFF"/>
+                    </a:solidFill>
+                  </a:tcPr>
                 </a:tc>
                 <a:tc>
                   <a:txBody>
@@ -10263,6 +10623,11 @@
                     </a:p>
                   </a:txBody>
                   <a:tcPr>
+                    <a:lnB w="9525" cap="flat" cmpd="sng" algn="ctr">
+                      <a:solidFill>
+                        <a:srgbClr val="D9D9D9"/>
+                      </a:solidFill>
+                    </a:lnB>
                     <a:solidFill>
                       <a:srgbClr val="F6DEDF"/>
                     </a:solidFill>
@@ -10287,6 +10652,11 @@
                     </a:p>
                   </a:txBody>
                   <a:tcPr>
+                    <a:lnB w="9525" cap="flat" cmpd="sng" algn="ctr">
+                      <a:solidFill>
+                        <a:srgbClr val="D9D9D9"/>
+                      </a:solidFill>
+                    </a:lnB>
                     <a:solidFill>
                       <a:srgbClr val="F2CFD1"/>
                     </a:solidFill>
@@ -10311,6 +10681,11 @@
                     </a:p>
                   </a:txBody>
                   <a:tcPr>
+                    <a:lnB w="9525" cap="flat" cmpd="sng" algn="ctr">
+                      <a:solidFill>
+                        <a:srgbClr val="D9D9D9"/>
+                      </a:solidFill>
+                    </a:lnB>
                     <a:solidFill>
                       <a:srgbClr val="F4D6D7"/>
                     </a:solidFill>
@@ -10335,6 +10710,11 @@
                     </a:p>
                   </a:txBody>
                   <a:tcPr>
+                    <a:lnB w="9525" cap="flat" cmpd="sng" algn="ctr">
+                      <a:solidFill>
+                        <a:srgbClr val="D9D9D9"/>
+                      </a:solidFill>
+                    </a:lnB>
                     <a:solidFill>
                       <a:srgbClr val="F0CACC"/>
                     </a:solidFill>
@@ -10359,6 +10739,11 @@
                     </a:p>
                   </a:txBody>
                   <a:tcPr>
+                    <a:lnB w="9525" cap="flat" cmpd="sng" algn="ctr">
+                      <a:solidFill>
+                        <a:srgbClr val="D9D9D9"/>
+                      </a:solidFill>
+                    </a:lnB>
                     <a:solidFill>
                       <a:srgbClr val="F3D4D5"/>
                     </a:solidFill>
@@ -10383,6 +10768,11 @@
                     </a:p>
                   </a:txBody>
                   <a:tcPr>
+                    <a:lnB w="9525" cap="flat" cmpd="sng" algn="ctr">
+                      <a:solidFill>
+                        <a:srgbClr val="D9D9D9"/>
+                      </a:solidFill>
+                    </a:lnB>
                     <a:solidFill>
                       <a:srgbClr val="F4D8D9"/>
                     </a:solidFill>
@@ -10408,7 +10798,16 @@
                       </a:r>
                     </a:p>
                   </a:txBody>
-                  <a:tcPr/>
+                  <a:tcPr>
+                    <a:lnB w="9525" cap="flat" cmpd="sng" algn="ctr">
+                      <a:solidFill>
+                        <a:srgbClr val="D9D9D9"/>
+                      </a:solidFill>
+                    </a:lnB>
+                    <a:solidFill>
+                      <a:srgbClr val="FFFFFF"/>
+                    </a:solidFill>
+                  </a:tcPr>
                 </a:tc>
                 <a:tc>
                   <a:txBody>
@@ -10429,6 +10828,11 @@
                     </a:p>
                   </a:txBody>
                   <a:tcPr>
+                    <a:lnB w="9525" cap="flat" cmpd="sng" algn="ctr">
+                      <a:solidFill>
+                        <a:srgbClr val="D9D9D9"/>
+                      </a:solidFill>
+                    </a:lnB>
                     <a:solidFill>
                       <a:srgbClr val="FAEDEE"/>
                     </a:solidFill>
@@ -10453,6 +10857,11 @@
                     </a:p>
                   </a:txBody>
                   <a:tcPr>
+                    <a:lnB w="9525" cap="flat" cmpd="sng" algn="ctr">
+                      <a:solidFill>
+                        <a:srgbClr val="D9D9D9"/>
+                      </a:solidFill>
+                    </a:lnB>
                     <a:solidFill>
                       <a:srgbClr val="FAECEC"/>
                     </a:solidFill>
@@ -10477,6 +10886,11 @@
                     </a:p>
                   </a:txBody>
                   <a:tcPr>
+                    <a:lnB w="9525" cap="flat" cmpd="sng" algn="ctr">
+                      <a:solidFill>
+                        <a:srgbClr val="D9D9D9"/>
+                      </a:solidFill>
+                    </a:lnB>
                     <a:solidFill>
                       <a:srgbClr val="F9E8E9"/>
                     </a:solidFill>
@@ -10501,6 +10915,11 @@
                     </a:p>
                   </a:txBody>
                   <a:tcPr>
+                    <a:lnB w="9525" cap="flat" cmpd="sng" algn="ctr">
+                      <a:solidFill>
+                        <a:srgbClr val="D9D9D9"/>
+                      </a:solidFill>
+                    </a:lnB>
                     <a:solidFill>
                       <a:srgbClr val="FAECEC"/>
                     </a:solidFill>
@@ -10525,6 +10944,11 @@
                     </a:p>
                   </a:txBody>
                   <a:tcPr>
+                    <a:lnB w="9525" cap="flat" cmpd="sng" algn="ctr">
+                      <a:solidFill>
+                        <a:srgbClr val="D9D9D9"/>
+                      </a:solidFill>
+                    </a:lnB>
                     <a:solidFill>
                       <a:srgbClr val="F9EBEB"/>
                     </a:solidFill>
@@ -10549,6 +10973,11 @@
                     </a:p>
                   </a:txBody>
                   <a:tcPr>
+                    <a:lnB w="9525" cap="flat" cmpd="sng" algn="ctr">
+                      <a:solidFill>
+                        <a:srgbClr val="D9D9D9"/>
+                      </a:solidFill>
+                    </a:lnB>
                     <a:solidFill>
                       <a:srgbClr val="F6E0E1"/>
                     </a:solidFill>
@@ -10677,20 +11106,6 @@
           </a:ln>
           <a:effectLst/>
         </p:spPr>
-        <p:style>
-          <a:lnRef idx="1">
-            <a:schemeClr val="accent1"/>
-          </a:lnRef>
-          <a:fillRef idx="3">
-            <a:schemeClr val="accent1"/>
-          </a:fillRef>
-          <a:effectRef idx="2">
-            <a:schemeClr val="accent1"/>
-          </a:effectRef>
-          <a:fontRef idx="minor">
-            <a:schemeClr val="lt1"/>
-          </a:fontRef>
-        </p:style>
         <p:txBody>
           <a:bodyPr rtlCol="0" anchor="ctr"/>
           <a:lstStyle/>
@@ -10979,20 +11394,6 @@
           </a:ln>
           <a:effectLst/>
         </p:spPr>
-        <p:style>
-          <a:lnRef idx="1">
-            <a:schemeClr val="accent1"/>
-          </a:lnRef>
-          <a:fillRef idx="3">
-            <a:schemeClr val="accent1"/>
-          </a:fillRef>
-          <a:effectRef idx="2">
-            <a:schemeClr val="accent1"/>
-          </a:effectRef>
-          <a:fontRef idx="minor">
-            <a:schemeClr val="lt1"/>
-          </a:fontRef>
-        </p:style>
         <p:txBody>
           <a:bodyPr rtlCol="0" anchor="ctr"/>
           <a:lstStyle/>
@@ -11023,20 +11424,6 @@
           </a:ln>
           <a:effectLst/>
         </p:spPr>
-        <p:style>
-          <a:lnRef idx="1">
-            <a:schemeClr val="accent1"/>
-          </a:lnRef>
-          <a:fillRef idx="3">
-            <a:schemeClr val="accent1"/>
-          </a:fillRef>
-          <a:effectRef idx="2">
-            <a:schemeClr val="accent1"/>
-          </a:effectRef>
-          <a:fontRef idx="minor">
-            <a:schemeClr val="lt1"/>
-          </a:fontRef>
-        </p:style>
         <p:txBody>
           <a:bodyPr rtlCol="0" anchor="ctr" wrap="square" lIns="175260"/>
           <a:lstStyle/>
@@ -11203,20 +11590,6 @@
           </a:ln>
           <a:effectLst/>
         </p:spPr>
-        <p:style>
-          <a:lnRef idx="1">
-            <a:schemeClr val="accent1"/>
-          </a:lnRef>
-          <a:fillRef idx="3">
-            <a:schemeClr val="accent1"/>
-          </a:fillRef>
-          <a:effectRef idx="2">
-            <a:schemeClr val="accent1"/>
-          </a:effectRef>
-          <a:fontRef idx="minor">
-            <a:schemeClr val="lt1"/>
-          </a:fontRef>
-        </p:style>
         <p:txBody>
           <a:bodyPr rtlCol="0" anchor="ctr"/>
           <a:lstStyle/>
@@ -11505,20 +11878,6 @@
           </a:ln>
           <a:effectLst/>
         </p:spPr>
-        <p:style>
-          <a:lnRef idx="1">
-            <a:schemeClr val="accent1"/>
-          </a:lnRef>
-          <a:fillRef idx="3">
-            <a:schemeClr val="accent1"/>
-          </a:fillRef>
-          <a:effectRef idx="2">
-            <a:schemeClr val="accent1"/>
-          </a:effectRef>
-          <a:fontRef idx="minor">
-            <a:schemeClr val="lt1"/>
-          </a:fontRef>
-        </p:style>
         <p:txBody>
           <a:bodyPr rtlCol="0" anchor="ctr"/>
           <a:lstStyle/>
@@ -11549,20 +11908,6 @@
           </a:ln>
           <a:effectLst/>
         </p:spPr>
-        <p:style>
-          <a:lnRef idx="1">
-            <a:schemeClr val="accent1"/>
-          </a:lnRef>
-          <a:fillRef idx="3">
-            <a:schemeClr val="accent1"/>
-          </a:fillRef>
-          <a:effectRef idx="2">
-            <a:schemeClr val="accent1"/>
-          </a:effectRef>
-          <a:fontRef idx="minor">
-            <a:schemeClr val="lt1"/>
-          </a:fontRef>
-        </p:style>
         <p:txBody>
           <a:bodyPr rtlCol="0" anchor="ctr" wrap="square" lIns="175260"/>
           <a:lstStyle/>
@@ -12425,20 +12770,6 @@
           </a:ln>
           <a:effectLst/>
         </p:spPr>
-        <p:style>
-          <a:lnRef idx="1">
-            <a:schemeClr val="accent1"/>
-          </a:lnRef>
-          <a:fillRef idx="3">
-            <a:schemeClr val="accent1"/>
-          </a:fillRef>
-          <a:effectRef idx="2">
-            <a:schemeClr val="accent1"/>
-          </a:effectRef>
-          <a:fontRef idx="minor">
-            <a:schemeClr val="lt1"/>
-          </a:fontRef>
-        </p:style>
         <p:txBody>
           <a:bodyPr rtlCol="0" anchor="ctr"/>
           <a:lstStyle/>
@@ -12727,20 +13058,6 @@
           </a:ln>
           <a:effectLst/>
         </p:spPr>
-        <p:style>
-          <a:lnRef idx="1">
-            <a:schemeClr val="accent1"/>
-          </a:lnRef>
-          <a:fillRef idx="3">
-            <a:schemeClr val="accent1"/>
-          </a:fillRef>
-          <a:effectRef idx="2">
-            <a:schemeClr val="accent1"/>
-          </a:effectRef>
-          <a:fontRef idx="minor">
-            <a:schemeClr val="lt1"/>
-          </a:fontRef>
-        </p:style>
         <p:txBody>
           <a:bodyPr rtlCol="0" anchor="ctr"/>
           <a:lstStyle/>
@@ -12771,20 +13088,6 @@
           </a:ln>
           <a:effectLst/>
         </p:spPr>
-        <p:style>
-          <a:lnRef idx="1">
-            <a:schemeClr val="accent1"/>
-          </a:lnRef>
-          <a:fillRef idx="3">
-            <a:schemeClr val="accent1"/>
-          </a:fillRef>
-          <a:effectRef idx="2">
-            <a:schemeClr val="accent1"/>
-          </a:effectRef>
-          <a:fontRef idx="minor">
-            <a:schemeClr val="lt1"/>
-          </a:fontRef>
-        </p:style>
         <p:txBody>
           <a:bodyPr rtlCol="0" anchor="ctr" wrap="square" lIns="175260"/>
           <a:lstStyle/>
@@ -12830,8 +13133,8 @@
         <a:graphic>
           <a:graphicData uri="http://schemas.openxmlformats.org/drawingml/2006/table">
             <a:tbl>
-              <a:tblPr firstRow="1" bandRow="1">
-                <a:tableStyleId>{5C22544A-7EE6-4342-B048-85BDC9FD1C3A}</a:tableStyleId>
+              <a:tblPr>
+                <a:tableStyleId>{2D5ABB26-0587-4C30-8999-92F81FD0307C}</a:tableStyleId>
               </a:tblPr>
               <a:tblGrid>
                 <a:gridCol w="944048"/>
@@ -12862,6 +13165,11 @@
                     </a:p>
                   </a:txBody>
                   <a:tcPr>
+                    <a:lnB w="19050" cap="flat" cmpd="sng" algn="ctr">
+                      <a:solidFill>
+                        <a:srgbClr val="C12026"/>
+                      </a:solidFill>
+                    </a:lnB>
                     <a:solidFill>
                       <a:srgbClr val="262626"/>
                     </a:solidFill>
@@ -12886,6 +13194,11 @@
                     </a:p>
                   </a:txBody>
                   <a:tcPr>
+                    <a:lnB w="19050" cap="flat" cmpd="sng" algn="ctr">
+                      <a:solidFill>
+                        <a:srgbClr val="C12026"/>
+                      </a:solidFill>
+                    </a:lnB>
                     <a:solidFill>
                       <a:srgbClr val="262626"/>
                     </a:solidFill>
@@ -12910,6 +13223,11 @@
                     </a:p>
                   </a:txBody>
                   <a:tcPr>
+                    <a:lnB w="19050" cap="flat" cmpd="sng" algn="ctr">
+                      <a:solidFill>
+                        <a:srgbClr val="C12026"/>
+                      </a:solidFill>
+                    </a:lnB>
                     <a:solidFill>
                       <a:srgbClr val="262626"/>
                     </a:solidFill>
@@ -12934,6 +13252,11 @@
                     </a:p>
                   </a:txBody>
                   <a:tcPr>
+                    <a:lnB w="19050" cap="flat" cmpd="sng" algn="ctr">
+                      <a:solidFill>
+                        <a:srgbClr val="C12026"/>
+                      </a:solidFill>
+                    </a:lnB>
                     <a:solidFill>
                       <a:srgbClr val="262626"/>
                     </a:solidFill>
@@ -12958,6 +13281,11 @@
                     </a:p>
                   </a:txBody>
                   <a:tcPr>
+                    <a:lnB w="19050" cap="flat" cmpd="sng" algn="ctr">
+                      <a:solidFill>
+                        <a:srgbClr val="C12026"/>
+                      </a:solidFill>
+                    </a:lnB>
                     <a:solidFill>
                       <a:srgbClr val="262626"/>
                     </a:solidFill>
@@ -12982,6 +13310,11 @@
                     </a:p>
                   </a:txBody>
                   <a:tcPr>
+                    <a:lnB w="19050" cap="flat" cmpd="sng" algn="ctr">
+                      <a:solidFill>
+                        <a:srgbClr val="C12026"/>
+                      </a:solidFill>
+                    </a:lnB>
                     <a:solidFill>
                       <a:srgbClr val="262626"/>
                     </a:solidFill>
@@ -13006,6 +13339,11 @@
                     </a:p>
                   </a:txBody>
                   <a:tcPr>
+                    <a:lnB w="19050" cap="flat" cmpd="sng" algn="ctr">
+                      <a:solidFill>
+                        <a:srgbClr val="C12026"/>
+                      </a:solidFill>
+                    </a:lnB>
                     <a:solidFill>
                       <a:srgbClr val="262626"/>
                     </a:solidFill>
@@ -13031,7 +13369,16 @@
                       </a:r>
                     </a:p>
                   </a:txBody>
-                  <a:tcPr/>
+                  <a:tcPr>
+                    <a:lnB w="9525" cap="flat" cmpd="sng" algn="ctr">
+                      <a:solidFill>
+                        <a:srgbClr val="D9D9D9"/>
+                      </a:solidFill>
+                    </a:lnB>
+                    <a:solidFill>
+                      <a:srgbClr val="FFFFFF"/>
+                    </a:solidFill>
+                  </a:tcPr>
                 </a:tc>
                 <a:tc>
                   <a:txBody>
@@ -13051,7 +13398,16 @@
                       </a:r>
                     </a:p>
                   </a:txBody>
-                  <a:tcPr/>
+                  <a:tcPr>
+                    <a:lnB w="9525" cap="flat" cmpd="sng" algn="ctr">
+                      <a:solidFill>
+                        <a:srgbClr val="D9D9D9"/>
+                      </a:solidFill>
+                    </a:lnB>
+                    <a:solidFill>
+                      <a:srgbClr val="FFFFFF"/>
+                    </a:solidFill>
+                  </a:tcPr>
                 </a:tc>
                 <a:tc>
                   <a:txBody>
@@ -13071,7 +13427,16 @@
                       </a:r>
                     </a:p>
                   </a:txBody>
-                  <a:tcPr/>
+                  <a:tcPr>
+                    <a:lnB w="9525" cap="flat" cmpd="sng" algn="ctr">
+                      <a:solidFill>
+                        <a:srgbClr val="D9D9D9"/>
+                      </a:solidFill>
+                    </a:lnB>
+                    <a:solidFill>
+                      <a:srgbClr val="FFFFFF"/>
+                    </a:solidFill>
+                  </a:tcPr>
                 </a:tc>
                 <a:tc>
                   <a:txBody>
@@ -13091,7 +13456,16 @@
                       </a:r>
                     </a:p>
                   </a:txBody>
-                  <a:tcPr/>
+                  <a:tcPr>
+                    <a:lnB w="9525" cap="flat" cmpd="sng" algn="ctr">
+                      <a:solidFill>
+                        <a:srgbClr val="D9D9D9"/>
+                      </a:solidFill>
+                    </a:lnB>
+                    <a:solidFill>
+                      <a:srgbClr val="FFFFFF"/>
+                    </a:solidFill>
+                  </a:tcPr>
                 </a:tc>
                 <a:tc>
                   <a:txBody>
@@ -13111,7 +13485,16 @@
                       </a:r>
                     </a:p>
                   </a:txBody>
-                  <a:tcPr/>
+                  <a:tcPr>
+                    <a:lnB w="9525" cap="flat" cmpd="sng" algn="ctr">
+                      <a:solidFill>
+                        <a:srgbClr val="D9D9D9"/>
+                      </a:solidFill>
+                    </a:lnB>
+                    <a:solidFill>
+                      <a:srgbClr val="FFFFFF"/>
+                    </a:solidFill>
+                  </a:tcPr>
                 </a:tc>
                 <a:tc>
                   <a:txBody>
@@ -13131,7 +13514,16 @@
                       </a:r>
                     </a:p>
                   </a:txBody>
-                  <a:tcPr/>
+                  <a:tcPr>
+                    <a:lnB w="9525" cap="flat" cmpd="sng" algn="ctr">
+                      <a:solidFill>
+                        <a:srgbClr val="D9D9D9"/>
+                      </a:solidFill>
+                    </a:lnB>
+                    <a:solidFill>
+                      <a:srgbClr val="FFFFFF"/>
+                    </a:solidFill>
+                  </a:tcPr>
                 </a:tc>
                 <a:tc>
                   <a:txBody>
@@ -13151,7 +13543,16 @@
                       </a:r>
                     </a:p>
                   </a:txBody>
-                  <a:tcPr/>
+                  <a:tcPr>
+                    <a:lnB w="9525" cap="flat" cmpd="sng" algn="ctr">
+                      <a:solidFill>
+                        <a:srgbClr val="D9D9D9"/>
+                      </a:solidFill>
+                    </a:lnB>
+                    <a:solidFill>
+                      <a:srgbClr val="FFFFFF"/>
+                    </a:solidFill>
+                  </a:tcPr>
                 </a:tc>
               </a:tr>
               <a:tr h="388445">
@@ -13174,6 +13575,11 @@
                     </a:p>
                   </a:txBody>
                   <a:tcPr>
+                    <a:lnB w="9525" cap="flat" cmpd="sng" algn="ctr">
+                      <a:solidFill>
+                        <a:srgbClr val="D9D9D9"/>
+                      </a:solidFill>
+                    </a:lnB>
                     <a:solidFill>
                       <a:srgbClr val="F7F7F7"/>
                     </a:solidFill>
@@ -13198,6 +13604,11 @@
                     </a:p>
                   </a:txBody>
                   <a:tcPr>
+                    <a:lnB w="9525" cap="flat" cmpd="sng" algn="ctr">
+                      <a:solidFill>
+                        <a:srgbClr val="D9D9D9"/>
+                      </a:solidFill>
+                    </a:lnB>
                     <a:solidFill>
                       <a:srgbClr val="F7F7F7"/>
                     </a:solidFill>
@@ -13222,6 +13633,11 @@
                     </a:p>
                   </a:txBody>
                   <a:tcPr>
+                    <a:lnB w="9525" cap="flat" cmpd="sng" algn="ctr">
+                      <a:solidFill>
+                        <a:srgbClr val="D9D9D9"/>
+                      </a:solidFill>
+                    </a:lnB>
                     <a:solidFill>
                       <a:srgbClr val="F7F7F7"/>
                     </a:solidFill>
@@ -13246,6 +13662,11 @@
                     </a:p>
                   </a:txBody>
                   <a:tcPr>
+                    <a:lnB w="9525" cap="flat" cmpd="sng" algn="ctr">
+                      <a:solidFill>
+                        <a:srgbClr val="D9D9D9"/>
+                      </a:solidFill>
+                    </a:lnB>
                     <a:solidFill>
                       <a:srgbClr val="F7F7F7"/>
                     </a:solidFill>
@@ -13270,6 +13691,11 @@
                     </a:p>
                   </a:txBody>
                   <a:tcPr>
+                    <a:lnB w="9525" cap="flat" cmpd="sng" algn="ctr">
+                      <a:solidFill>
+                        <a:srgbClr val="D9D9D9"/>
+                      </a:solidFill>
+                    </a:lnB>
                     <a:solidFill>
                       <a:srgbClr val="F7F7F7"/>
                     </a:solidFill>
@@ -13294,6 +13720,11 @@
                     </a:p>
                   </a:txBody>
                   <a:tcPr>
+                    <a:lnB w="9525" cap="flat" cmpd="sng" algn="ctr">
+                      <a:solidFill>
+                        <a:srgbClr val="D9D9D9"/>
+                      </a:solidFill>
+                    </a:lnB>
                     <a:solidFill>
                       <a:srgbClr val="F7F7F7"/>
                     </a:solidFill>
@@ -13318,6 +13749,11 @@
                     </a:p>
                   </a:txBody>
                   <a:tcPr>
+                    <a:lnB w="9525" cap="flat" cmpd="sng" algn="ctr">
+                      <a:solidFill>
+                        <a:srgbClr val="D9D9D9"/>
+                      </a:solidFill>
+                    </a:lnB>
                     <a:solidFill>
                       <a:srgbClr val="F7F7F7"/>
                     </a:solidFill>
@@ -13343,7 +13779,16 @@
                       </a:r>
                     </a:p>
                   </a:txBody>
-                  <a:tcPr/>
+                  <a:tcPr>
+                    <a:lnB w="9525" cap="flat" cmpd="sng" algn="ctr">
+                      <a:solidFill>
+                        <a:srgbClr val="D9D9D9"/>
+                      </a:solidFill>
+                    </a:lnB>
+                    <a:solidFill>
+                      <a:srgbClr val="FFFFFF"/>
+                    </a:solidFill>
+                  </a:tcPr>
                 </a:tc>
                 <a:tc>
                   <a:txBody>
@@ -13363,7 +13808,16 @@
                       </a:r>
                     </a:p>
                   </a:txBody>
-                  <a:tcPr/>
+                  <a:tcPr>
+                    <a:lnB w="9525" cap="flat" cmpd="sng" algn="ctr">
+                      <a:solidFill>
+                        <a:srgbClr val="D9D9D9"/>
+                      </a:solidFill>
+                    </a:lnB>
+                    <a:solidFill>
+                      <a:srgbClr val="FFFFFF"/>
+                    </a:solidFill>
+                  </a:tcPr>
                 </a:tc>
                 <a:tc>
                   <a:txBody>
@@ -13383,7 +13837,16 @@
                       </a:r>
                     </a:p>
                   </a:txBody>
-                  <a:tcPr/>
+                  <a:tcPr>
+                    <a:lnB w="9525" cap="flat" cmpd="sng" algn="ctr">
+                      <a:solidFill>
+                        <a:srgbClr val="D9D9D9"/>
+                      </a:solidFill>
+                    </a:lnB>
+                    <a:solidFill>
+                      <a:srgbClr val="FFFFFF"/>
+                    </a:solidFill>
+                  </a:tcPr>
                 </a:tc>
                 <a:tc>
                   <a:txBody>
@@ -13403,7 +13866,16 @@
                       </a:r>
                     </a:p>
                   </a:txBody>
-                  <a:tcPr/>
+                  <a:tcPr>
+                    <a:lnB w="9525" cap="flat" cmpd="sng" algn="ctr">
+                      <a:solidFill>
+                        <a:srgbClr val="D9D9D9"/>
+                      </a:solidFill>
+                    </a:lnB>
+                    <a:solidFill>
+                      <a:srgbClr val="FFFFFF"/>
+                    </a:solidFill>
+                  </a:tcPr>
                 </a:tc>
                 <a:tc>
                   <a:txBody>
@@ -13423,7 +13895,16 @@
                       </a:r>
                     </a:p>
                   </a:txBody>
-                  <a:tcPr/>
+                  <a:tcPr>
+                    <a:lnB w="9525" cap="flat" cmpd="sng" algn="ctr">
+                      <a:solidFill>
+                        <a:srgbClr val="D9D9D9"/>
+                      </a:solidFill>
+                    </a:lnB>
+                    <a:solidFill>
+                      <a:srgbClr val="FFFFFF"/>
+                    </a:solidFill>
+                  </a:tcPr>
                 </a:tc>
                 <a:tc>
                   <a:txBody>
@@ -13443,7 +13924,16 @@
                       </a:r>
                     </a:p>
                   </a:txBody>
-                  <a:tcPr/>
+                  <a:tcPr>
+                    <a:lnB w="9525" cap="flat" cmpd="sng" algn="ctr">
+                      <a:solidFill>
+                        <a:srgbClr val="D9D9D9"/>
+                      </a:solidFill>
+                    </a:lnB>
+                    <a:solidFill>
+                      <a:srgbClr val="FFFFFF"/>
+                    </a:solidFill>
+                  </a:tcPr>
                 </a:tc>
                 <a:tc>
                   <a:txBody>
@@ -13463,7 +13953,16 @@
                       </a:r>
                     </a:p>
                   </a:txBody>
-                  <a:tcPr/>
+                  <a:tcPr>
+                    <a:lnB w="9525" cap="flat" cmpd="sng" algn="ctr">
+                      <a:solidFill>
+                        <a:srgbClr val="D9D9D9"/>
+                      </a:solidFill>
+                    </a:lnB>
+                    <a:solidFill>
+                      <a:srgbClr val="FFFFFF"/>
+                    </a:solidFill>
+                  </a:tcPr>
                 </a:tc>
               </a:tr>
               <a:tr h="388445">
@@ -13486,6 +13985,11 @@
                     </a:p>
                   </a:txBody>
                   <a:tcPr>
+                    <a:lnB w="9525" cap="flat" cmpd="sng" algn="ctr">
+                      <a:solidFill>
+                        <a:srgbClr val="D9D9D9"/>
+                      </a:solidFill>
+                    </a:lnB>
                     <a:solidFill>
                       <a:srgbClr val="F7F7F7"/>
                     </a:solidFill>
@@ -13510,6 +14014,11 @@
                     </a:p>
                   </a:txBody>
                   <a:tcPr>
+                    <a:lnB w="9525" cap="flat" cmpd="sng" algn="ctr">
+                      <a:solidFill>
+                        <a:srgbClr val="D9D9D9"/>
+                      </a:solidFill>
+                    </a:lnB>
                     <a:solidFill>
                       <a:srgbClr val="F7F7F7"/>
                     </a:solidFill>
@@ -13534,6 +14043,11 @@
                     </a:p>
                   </a:txBody>
                   <a:tcPr>
+                    <a:lnB w="9525" cap="flat" cmpd="sng" algn="ctr">
+                      <a:solidFill>
+                        <a:srgbClr val="D9D9D9"/>
+                      </a:solidFill>
+                    </a:lnB>
                     <a:solidFill>
                       <a:srgbClr val="F7F7F7"/>
                     </a:solidFill>
@@ -13558,6 +14072,11 @@
                     </a:p>
                   </a:txBody>
                   <a:tcPr>
+                    <a:lnB w="9525" cap="flat" cmpd="sng" algn="ctr">
+                      <a:solidFill>
+                        <a:srgbClr val="D9D9D9"/>
+                      </a:solidFill>
+                    </a:lnB>
                     <a:solidFill>
                       <a:srgbClr val="F7F7F7"/>
                     </a:solidFill>
@@ -13582,6 +14101,11 @@
                     </a:p>
                   </a:txBody>
                   <a:tcPr>
+                    <a:lnB w="9525" cap="flat" cmpd="sng" algn="ctr">
+                      <a:solidFill>
+                        <a:srgbClr val="D9D9D9"/>
+                      </a:solidFill>
+                    </a:lnB>
                     <a:solidFill>
                       <a:srgbClr val="F7F7F7"/>
                     </a:solidFill>
@@ -13606,6 +14130,11 @@
                     </a:p>
                   </a:txBody>
                   <a:tcPr>
+                    <a:lnB w="9525" cap="flat" cmpd="sng" algn="ctr">
+                      <a:solidFill>
+                        <a:srgbClr val="D9D9D9"/>
+                      </a:solidFill>
+                    </a:lnB>
                     <a:solidFill>
                       <a:srgbClr val="F7F7F7"/>
                     </a:solidFill>
@@ -13630,6 +14159,11 @@
                     </a:p>
                   </a:txBody>
                   <a:tcPr>
+                    <a:lnB w="9525" cap="flat" cmpd="sng" algn="ctr">
+                      <a:solidFill>
+                        <a:srgbClr val="D9D9D9"/>
+                      </a:solidFill>
+                    </a:lnB>
                     <a:solidFill>
                       <a:srgbClr val="F7F7F7"/>
                     </a:solidFill>
@@ -13655,7 +14189,16 @@
                       </a:r>
                     </a:p>
                   </a:txBody>
-                  <a:tcPr/>
+                  <a:tcPr>
+                    <a:lnB w="9525" cap="flat" cmpd="sng" algn="ctr">
+                      <a:solidFill>
+                        <a:srgbClr val="D9D9D9"/>
+                      </a:solidFill>
+                    </a:lnB>
+                    <a:solidFill>
+                      <a:srgbClr val="FFFFFF"/>
+                    </a:solidFill>
+                  </a:tcPr>
                 </a:tc>
                 <a:tc>
                   <a:txBody>
@@ -13675,7 +14218,16 @@
                       </a:r>
                     </a:p>
                   </a:txBody>
-                  <a:tcPr/>
+                  <a:tcPr>
+                    <a:lnB w="9525" cap="flat" cmpd="sng" algn="ctr">
+                      <a:solidFill>
+                        <a:srgbClr val="D9D9D9"/>
+                      </a:solidFill>
+                    </a:lnB>
+                    <a:solidFill>
+                      <a:srgbClr val="FFFFFF"/>
+                    </a:solidFill>
+                  </a:tcPr>
                 </a:tc>
                 <a:tc>
                   <a:txBody>
@@ -13695,7 +14247,16 @@
                       </a:r>
                     </a:p>
                   </a:txBody>
-                  <a:tcPr/>
+                  <a:tcPr>
+                    <a:lnB w="9525" cap="flat" cmpd="sng" algn="ctr">
+                      <a:solidFill>
+                        <a:srgbClr val="D9D9D9"/>
+                      </a:solidFill>
+                    </a:lnB>
+                    <a:solidFill>
+                      <a:srgbClr val="FFFFFF"/>
+                    </a:solidFill>
+                  </a:tcPr>
                 </a:tc>
                 <a:tc>
                   <a:txBody>
@@ -13715,7 +14276,16 @@
                       </a:r>
                     </a:p>
                   </a:txBody>
-                  <a:tcPr/>
+                  <a:tcPr>
+                    <a:lnB w="9525" cap="flat" cmpd="sng" algn="ctr">
+                      <a:solidFill>
+                        <a:srgbClr val="D9D9D9"/>
+                      </a:solidFill>
+                    </a:lnB>
+                    <a:solidFill>
+                      <a:srgbClr val="FFFFFF"/>
+                    </a:solidFill>
+                  </a:tcPr>
                 </a:tc>
                 <a:tc>
                   <a:txBody>
@@ -13735,7 +14305,16 @@
                       </a:r>
                     </a:p>
                   </a:txBody>
-                  <a:tcPr/>
+                  <a:tcPr>
+                    <a:lnB w="9525" cap="flat" cmpd="sng" algn="ctr">
+                      <a:solidFill>
+                        <a:srgbClr val="D9D9D9"/>
+                      </a:solidFill>
+                    </a:lnB>
+                    <a:solidFill>
+                      <a:srgbClr val="FFFFFF"/>
+                    </a:solidFill>
+                  </a:tcPr>
                 </a:tc>
                 <a:tc>
                   <a:txBody>
@@ -13755,7 +14334,16 @@
                       </a:r>
                     </a:p>
                   </a:txBody>
-                  <a:tcPr/>
+                  <a:tcPr>
+                    <a:lnB w="9525" cap="flat" cmpd="sng" algn="ctr">
+                      <a:solidFill>
+                        <a:srgbClr val="D9D9D9"/>
+                      </a:solidFill>
+                    </a:lnB>
+                    <a:solidFill>
+                      <a:srgbClr val="FFFFFF"/>
+                    </a:solidFill>
+                  </a:tcPr>
                 </a:tc>
                 <a:tc>
                   <a:txBody>
@@ -13775,7 +14363,16 @@
                       </a:r>
                     </a:p>
                   </a:txBody>
-                  <a:tcPr/>
+                  <a:tcPr>
+                    <a:lnB w="9525" cap="flat" cmpd="sng" algn="ctr">
+                      <a:solidFill>
+                        <a:srgbClr val="D9D9D9"/>
+                      </a:solidFill>
+                    </a:lnB>
+                    <a:solidFill>
+                      <a:srgbClr val="FFFFFF"/>
+                    </a:solidFill>
+                  </a:tcPr>
                 </a:tc>
               </a:tr>
               <a:tr h="388445">
@@ -13798,6 +14395,11 @@
                     </a:p>
                   </a:txBody>
                   <a:tcPr>
+                    <a:lnB w="9525" cap="flat" cmpd="sng" algn="ctr">
+                      <a:solidFill>
+                        <a:srgbClr val="D9D9D9"/>
+                      </a:solidFill>
+                    </a:lnB>
                     <a:solidFill>
                       <a:srgbClr val="F7F7F7"/>
                     </a:solidFill>
@@ -13822,6 +14424,11 @@
                     </a:p>
                   </a:txBody>
                   <a:tcPr>
+                    <a:lnB w="9525" cap="flat" cmpd="sng" algn="ctr">
+                      <a:solidFill>
+                        <a:srgbClr val="D9D9D9"/>
+                      </a:solidFill>
+                    </a:lnB>
                     <a:solidFill>
                       <a:srgbClr val="F7F7F7"/>
                     </a:solidFill>
@@ -13846,6 +14453,11 @@
                     </a:p>
                   </a:txBody>
                   <a:tcPr>
+                    <a:lnB w="9525" cap="flat" cmpd="sng" algn="ctr">
+                      <a:solidFill>
+                        <a:srgbClr val="D9D9D9"/>
+                      </a:solidFill>
+                    </a:lnB>
                     <a:solidFill>
                       <a:srgbClr val="F7F7F7"/>
                     </a:solidFill>
@@ -13870,6 +14482,11 @@
                     </a:p>
                   </a:txBody>
                   <a:tcPr>
+                    <a:lnB w="9525" cap="flat" cmpd="sng" algn="ctr">
+                      <a:solidFill>
+                        <a:srgbClr val="D9D9D9"/>
+                      </a:solidFill>
+                    </a:lnB>
                     <a:solidFill>
                       <a:srgbClr val="F7F7F7"/>
                     </a:solidFill>
@@ -13894,6 +14511,11 @@
                     </a:p>
                   </a:txBody>
                   <a:tcPr>
+                    <a:lnB w="9525" cap="flat" cmpd="sng" algn="ctr">
+                      <a:solidFill>
+                        <a:srgbClr val="D9D9D9"/>
+                      </a:solidFill>
+                    </a:lnB>
                     <a:solidFill>
                       <a:srgbClr val="F7F7F7"/>
                     </a:solidFill>
@@ -13918,6 +14540,11 @@
                     </a:p>
                   </a:txBody>
                   <a:tcPr>
+                    <a:lnB w="9525" cap="flat" cmpd="sng" algn="ctr">
+                      <a:solidFill>
+                        <a:srgbClr val="D9D9D9"/>
+                      </a:solidFill>
+                    </a:lnB>
                     <a:solidFill>
                       <a:srgbClr val="F7F7F7"/>
                     </a:solidFill>
@@ -13942,6 +14569,11 @@
                     </a:p>
                   </a:txBody>
                   <a:tcPr>
+                    <a:lnB w="9525" cap="flat" cmpd="sng" algn="ctr">
+                      <a:solidFill>
+                        <a:srgbClr val="D9D9D9"/>
+                      </a:solidFill>
+                    </a:lnB>
                     <a:solidFill>
                       <a:srgbClr val="F7F7F7"/>
                     </a:solidFill>
@@ -13967,7 +14599,16 @@
                       </a:r>
                     </a:p>
                   </a:txBody>
-                  <a:tcPr/>
+                  <a:tcPr>
+                    <a:lnB w="9525" cap="flat" cmpd="sng" algn="ctr">
+                      <a:solidFill>
+                        <a:srgbClr val="D9D9D9"/>
+                      </a:solidFill>
+                    </a:lnB>
+                    <a:solidFill>
+                      <a:srgbClr val="FFFFFF"/>
+                    </a:solidFill>
+                  </a:tcPr>
                 </a:tc>
                 <a:tc>
                   <a:txBody>
@@ -13987,7 +14628,16 @@
                       </a:r>
                     </a:p>
                   </a:txBody>
-                  <a:tcPr/>
+                  <a:tcPr>
+                    <a:lnB w="9525" cap="flat" cmpd="sng" algn="ctr">
+                      <a:solidFill>
+                        <a:srgbClr val="D9D9D9"/>
+                      </a:solidFill>
+                    </a:lnB>
+                    <a:solidFill>
+                      <a:srgbClr val="FFFFFF"/>
+                    </a:solidFill>
+                  </a:tcPr>
                 </a:tc>
                 <a:tc>
                   <a:txBody>
@@ -14007,7 +14657,16 @@
                       </a:r>
                     </a:p>
                   </a:txBody>
-                  <a:tcPr/>
+                  <a:tcPr>
+                    <a:lnB w="9525" cap="flat" cmpd="sng" algn="ctr">
+                      <a:solidFill>
+                        <a:srgbClr val="D9D9D9"/>
+                      </a:solidFill>
+                    </a:lnB>
+                    <a:solidFill>
+                      <a:srgbClr val="FFFFFF"/>
+                    </a:solidFill>
+                  </a:tcPr>
                 </a:tc>
                 <a:tc>
                   <a:txBody>
@@ -14027,7 +14686,16 @@
                       </a:r>
                     </a:p>
                   </a:txBody>
-                  <a:tcPr/>
+                  <a:tcPr>
+                    <a:lnB w="9525" cap="flat" cmpd="sng" algn="ctr">
+                      <a:solidFill>
+                        <a:srgbClr val="D9D9D9"/>
+                      </a:solidFill>
+                    </a:lnB>
+                    <a:solidFill>
+                      <a:srgbClr val="FFFFFF"/>
+                    </a:solidFill>
+                  </a:tcPr>
                 </a:tc>
                 <a:tc>
                   <a:txBody>
@@ -14047,7 +14715,16 @@
                       </a:r>
                     </a:p>
                   </a:txBody>
-                  <a:tcPr/>
+                  <a:tcPr>
+                    <a:lnB w="9525" cap="flat" cmpd="sng" algn="ctr">
+                      <a:solidFill>
+                        <a:srgbClr val="D9D9D9"/>
+                      </a:solidFill>
+                    </a:lnB>
+                    <a:solidFill>
+                      <a:srgbClr val="FFFFFF"/>
+                    </a:solidFill>
+                  </a:tcPr>
                 </a:tc>
                 <a:tc>
                   <a:txBody>
@@ -14067,7 +14744,16 @@
                       </a:r>
                     </a:p>
                   </a:txBody>
-                  <a:tcPr/>
+                  <a:tcPr>
+                    <a:lnB w="9525" cap="flat" cmpd="sng" algn="ctr">
+                      <a:solidFill>
+                        <a:srgbClr val="D9D9D9"/>
+                      </a:solidFill>
+                    </a:lnB>
+                    <a:solidFill>
+                      <a:srgbClr val="FFFFFF"/>
+                    </a:solidFill>
+                  </a:tcPr>
                 </a:tc>
                 <a:tc>
                   <a:txBody>
@@ -14087,7 +14773,16 @@
                       </a:r>
                     </a:p>
                   </a:txBody>
-                  <a:tcPr/>
+                  <a:tcPr>
+                    <a:lnB w="9525" cap="flat" cmpd="sng" algn="ctr">
+                      <a:solidFill>
+                        <a:srgbClr val="D9D9D9"/>
+                      </a:solidFill>
+                    </a:lnB>
+                    <a:solidFill>
+                      <a:srgbClr val="FFFFFF"/>
+                    </a:solidFill>
+                  </a:tcPr>
                 </a:tc>
               </a:tr>
               <a:tr h="388445">
@@ -14110,6 +14805,11 @@
                     </a:p>
                   </a:txBody>
                   <a:tcPr>
+                    <a:lnB w="9525" cap="flat" cmpd="sng" algn="ctr">
+                      <a:solidFill>
+                        <a:srgbClr val="D9D9D9"/>
+                      </a:solidFill>
+                    </a:lnB>
                     <a:solidFill>
                       <a:srgbClr val="F7F7F7"/>
                     </a:solidFill>
@@ -14134,6 +14834,11 @@
                     </a:p>
                   </a:txBody>
                   <a:tcPr>
+                    <a:lnB w="9525" cap="flat" cmpd="sng" algn="ctr">
+                      <a:solidFill>
+                        <a:srgbClr val="D9D9D9"/>
+                      </a:solidFill>
+                    </a:lnB>
                     <a:solidFill>
                       <a:srgbClr val="F7F7F7"/>
                     </a:solidFill>
@@ -14158,6 +14863,11 @@
                     </a:p>
                   </a:txBody>
                   <a:tcPr>
+                    <a:lnB w="9525" cap="flat" cmpd="sng" algn="ctr">
+                      <a:solidFill>
+                        <a:srgbClr val="D9D9D9"/>
+                      </a:solidFill>
+                    </a:lnB>
                     <a:solidFill>
                       <a:srgbClr val="F7F7F7"/>
                     </a:solidFill>
@@ -14182,6 +14892,11 @@
                     </a:p>
                   </a:txBody>
                   <a:tcPr>
+                    <a:lnB w="9525" cap="flat" cmpd="sng" algn="ctr">
+                      <a:solidFill>
+                        <a:srgbClr val="D9D9D9"/>
+                      </a:solidFill>
+                    </a:lnB>
                     <a:solidFill>
                       <a:srgbClr val="F7F7F7"/>
                     </a:solidFill>
@@ -14206,6 +14921,11 @@
                     </a:p>
                   </a:txBody>
                   <a:tcPr>
+                    <a:lnB w="9525" cap="flat" cmpd="sng" algn="ctr">
+                      <a:solidFill>
+                        <a:srgbClr val="D9D9D9"/>
+                      </a:solidFill>
+                    </a:lnB>
                     <a:solidFill>
                       <a:srgbClr val="F7F7F7"/>
                     </a:solidFill>
@@ -14230,6 +14950,11 @@
                     </a:p>
                   </a:txBody>
                   <a:tcPr>
+                    <a:lnB w="9525" cap="flat" cmpd="sng" algn="ctr">
+                      <a:solidFill>
+                        <a:srgbClr val="D9D9D9"/>
+                      </a:solidFill>
+                    </a:lnB>
                     <a:solidFill>
                       <a:srgbClr val="F7F7F7"/>
                     </a:solidFill>
@@ -14254,6 +14979,11 @@
                     </a:p>
                   </a:txBody>
                   <a:tcPr>
+                    <a:lnB w="9525" cap="flat" cmpd="sng" algn="ctr">
+                      <a:solidFill>
+                        <a:srgbClr val="D9D9D9"/>
+                      </a:solidFill>
+                    </a:lnB>
                     <a:solidFill>
                       <a:srgbClr val="F7F7F7"/>
                     </a:solidFill>
@@ -14279,7 +15009,16 @@
                       </a:r>
                     </a:p>
                   </a:txBody>
-                  <a:tcPr/>
+                  <a:tcPr>
+                    <a:lnB w="9525" cap="flat" cmpd="sng" algn="ctr">
+                      <a:solidFill>
+                        <a:srgbClr val="D9D9D9"/>
+                      </a:solidFill>
+                    </a:lnB>
+                    <a:solidFill>
+                      <a:srgbClr val="FFFFFF"/>
+                    </a:solidFill>
+                  </a:tcPr>
                 </a:tc>
                 <a:tc>
                   <a:txBody>
@@ -14299,7 +15038,16 @@
                       </a:r>
                     </a:p>
                   </a:txBody>
-                  <a:tcPr/>
+                  <a:tcPr>
+                    <a:lnB w="9525" cap="flat" cmpd="sng" algn="ctr">
+                      <a:solidFill>
+                        <a:srgbClr val="D9D9D9"/>
+                      </a:solidFill>
+                    </a:lnB>
+                    <a:solidFill>
+                      <a:srgbClr val="FFFFFF"/>
+                    </a:solidFill>
+                  </a:tcPr>
                 </a:tc>
                 <a:tc>
                   <a:txBody>
@@ -14319,7 +15067,16 @@
                       </a:r>
                     </a:p>
                   </a:txBody>
-                  <a:tcPr/>
+                  <a:tcPr>
+                    <a:lnB w="9525" cap="flat" cmpd="sng" algn="ctr">
+                      <a:solidFill>
+                        <a:srgbClr val="D9D9D9"/>
+                      </a:solidFill>
+                    </a:lnB>
+                    <a:solidFill>
+                      <a:srgbClr val="FFFFFF"/>
+                    </a:solidFill>
+                  </a:tcPr>
                 </a:tc>
                 <a:tc>
                   <a:txBody>
@@ -14339,7 +15096,16 @@
                       </a:r>
                     </a:p>
                   </a:txBody>
-                  <a:tcPr/>
+                  <a:tcPr>
+                    <a:lnB w="9525" cap="flat" cmpd="sng" algn="ctr">
+                      <a:solidFill>
+                        <a:srgbClr val="D9D9D9"/>
+                      </a:solidFill>
+                    </a:lnB>
+                    <a:solidFill>
+                      <a:srgbClr val="FFFFFF"/>
+                    </a:solidFill>
+                  </a:tcPr>
                 </a:tc>
                 <a:tc>
                   <a:txBody>
@@ -14359,7 +15125,16 @@
                       </a:r>
                     </a:p>
                   </a:txBody>
-                  <a:tcPr/>
+                  <a:tcPr>
+                    <a:lnB w="9525" cap="flat" cmpd="sng" algn="ctr">
+                      <a:solidFill>
+                        <a:srgbClr val="D9D9D9"/>
+                      </a:solidFill>
+                    </a:lnB>
+                    <a:solidFill>
+                      <a:srgbClr val="FFFFFF"/>
+                    </a:solidFill>
+                  </a:tcPr>
                 </a:tc>
                 <a:tc>
                   <a:txBody>
@@ -14379,7 +15154,16 @@
                       </a:r>
                     </a:p>
                   </a:txBody>
-                  <a:tcPr/>
+                  <a:tcPr>
+                    <a:lnB w="9525" cap="flat" cmpd="sng" algn="ctr">
+                      <a:solidFill>
+                        <a:srgbClr val="D9D9D9"/>
+                      </a:solidFill>
+                    </a:lnB>
+                    <a:solidFill>
+                      <a:srgbClr val="FFFFFF"/>
+                    </a:solidFill>
+                  </a:tcPr>
                 </a:tc>
                 <a:tc>
                   <a:txBody>
@@ -14399,7 +15183,16 @@
                       </a:r>
                     </a:p>
                   </a:txBody>
-                  <a:tcPr/>
+                  <a:tcPr>
+                    <a:lnB w="9525" cap="flat" cmpd="sng" algn="ctr">
+                      <a:solidFill>
+                        <a:srgbClr val="D9D9D9"/>
+                      </a:solidFill>
+                    </a:lnB>
+                    <a:solidFill>
+                      <a:srgbClr val="FFFFFF"/>
+                    </a:solidFill>
+                  </a:tcPr>
                 </a:tc>
               </a:tr>
               <a:tr h="388450">
@@ -14422,6 +15215,11 @@
                     </a:p>
                   </a:txBody>
                   <a:tcPr>
+                    <a:lnB w="9525" cap="flat" cmpd="sng" algn="ctr">
+                      <a:solidFill>
+                        <a:srgbClr val="D9D9D9"/>
+                      </a:solidFill>
+                    </a:lnB>
                     <a:solidFill>
                       <a:srgbClr val="F7F7F7"/>
                     </a:solidFill>
@@ -14446,6 +15244,11 @@
                     </a:p>
                   </a:txBody>
                   <a:tcPr>
+                    <a:lnB w="9525" cap="flat" cmpd="sng" algn="ctr">
+                      <a:solidFill>
+                        <a:srgbClr val="D9D9D9"/>
+                      </a:solidFill>
+                    </a:lnB>
                     <a:solidFill>
                       <a:srgbClr val="F7F7F7"/>
                     </a:solidFill>
@@ -14470,6 +15273,11 @@
                     </a:p>
                   </a:txBody>
                   <a:tcPr>
+                    <a:lnB w="9525" cap="flat" cmpd="sng" algn="ctr">
+                      <a:solidFill>
+                        <a:srgbClr val="D9D9D9"/>
+                      </a:solidFill>
+                    </a:lnB>
                     <a:solidFill>
                       <a:srgbClr val="F7F7F7"/>
                     </a:solidFill>
@@ -14494,6 +15302,11 @@
                     </a:p>
                   </a:txBody>
                   <a:tcPr>
+                    <a:lnB w="9525" cap="flat" cmpd="sng" algn="ctr">
+                      <a:solidFill>
+                        <a:srgbClr val="D9D9D9"/>
+                      </a:solidFill>
+                    </a:lnB>
                     <a:solidFill>
                       <a:srgbClr val="F7F7F7"/>
                     </a:solidFill>
@@ -14518,6 +15331,11 @@
                     </a:p>
                   </a:txBody>
                   <a:tcPr>
+                    <a:lnB w="9525" cap="flat" cmpd="sng" algn="ctr">
+                      <a:solidFill>
+                        <a:srgbClr val="D9D9D9"/>
+                      </a:solidFill>
+                    </a:lnB>
                     <a:solidFill>
                       <a:srgbClr val="F7F7F7"/>
                     </a:solidFill>
@@ -14542,6 +15360,11 @@
                     </a:p>
                   </a:txBody>
                   <a:tcPr>
+                    <a:lnB w="9525" cap="flat" cmpd="sng" algn="ctr">
+                      <a:solidFill>
+                        <a:srgbClr val="D9D9D9"/>
+                      </a:solidFill>
+                    </a:lnB>
                     <a:solidFill>
                       <a:srgbClr val="F7F7F7"/>
                     </a:solidFill>
@@ -14566,6 +15389,11 @@
                     </a:p>
                   </a:txBody>
                   <a:tcPr>
+                    <a:lnB w="9525" cap="flat" cmpd="sng" algn="ctr">
+                      <a:solidFill>
+                        <a:srgbClr val="D9D9D9"/>
+                      </a:solidFill>
+                    </a:lnB>
                     <a:solidFill>
                       <a:srgbClr val="F7F7F7"/>
                     </a:solidFill>
@@ -14694,20 +15522,6 @@
           </a:ln>
           <a:effectLst/>
         </p:spPr>
-        <p:style>
-          <a:lnRef idx="1">
-            <a:schemeClr val="accent1"/>
-          </a:lnRef>
-          <a:fillRef idx="3">
-            <a:schemeClr val="accent1"/>
-          </a:fillRef>
-          <a:effectRef idx="2">
-            <a:schemeClr val="accent1"/>
-          </a:effectRef>
-          <a:fontRef idx="minor">
-            <a:schemeClr val="lt1"/>
-          </a:fontRef>
-        </p:style>
         <p:txBody>
           <a:bodyPr rtlCol="0" anchor="ctr"/>
           <a:lstStyle/>
@@ -14996,20 +15810,6 @@
           </a:ln>
           <a:effectLst/>
         </p:spPr>
-        <p:style>
-          <a:lnRef idx="1">
-            <a:schemeClr val="accent1"/>
-          </a:lnRef>
-          <a:fillRef idx="3">
-            <a:schemeClr val="accent1"/>
-          </a:fillRef>
-          <a:effectRef idx="2">
-            <a:schemeClr val="accent1"/>
-          </a:effectRef>
-          <a:fontRef idx="minor">
-            <a:schemeClr val="lt1"/>
-          </a:fontRef>
-        </p:style>
         <p:txBody>
           <a:bodyPr rtlCol="0" anchor="ctr"/>
           <a:lstStyle/>
@@ -15040,20 +15840,6 @@
           </a:ln>
           <a:effectLst/>
         </p:spPr>
-        <p:style>
-          <a:lnRef idx="1">
-            <a:schemeClr val="accent1"/>
-          </a:lnRef>
-          <a:fillRef idx="3">
-            <a:schemeClr val="accent1"/>
-          </a:fillRef>
-          <a:effectRef idx="2">
-            <a:schemeClr val="accent1"/>
-          </a:effectRef>
-          <a:fontRef idx="minor">
-            <a:schemeClr val="lt1"/>
-          </a:fontRef>
-        </p:style>
         <p:txBody>
           <a:bodyPr rtlCol="0" anchor="ctr" wrap="square" lIns="175260"/>
           <a:lstStyle/>
@@ -15418,20 +16204,6 @@
           </a:ln>
           <a:effectLst/>
         </p:spPr>
-        <p:style>
-          <a:lnRef idx="1">
-            <a:schemeClr val="accent1"/>
-          </a:lnRef>
-          <a:fillRef idx="3">
-            <a:schemeClr val="accent1"/>
-          </a:fillRef>
-          <a:effectRef idx="2">
-            <a:schemeClr val="accent1"/>
-          </a:effectRef>
-          <a:fontRef idx="minor">
-            <a:schemeClr val="lt1"/>
-          </a:fontRef>
-        </p:style>
         <p:txBody>
           <a:bodyPr rtlCol="0" anchor="ctr"/>
           <a:lstStyle/>
@@ -15462,20 +16234,6 @@
           </a:ln>
           <a:effectLst/>
         </p:spPr>
-        <p:style>
-          <a:lnRef idx="1">
-            <a:schemeClr val="accent1"/>
-          </a:lnRef>
-          <a:fillRef idx="3">
-            <a:schemeClr val="accent1"/>
-          </a:fillRef>
-          <a:effectRef idx="2">
-            <a:schemeClr val="accent1"/>
-          </a:effectRef>
-          <a:fontRef idx="minor">
-            <a:schemeClr val="lt1"/>
-          </a:fontRef>
-        </p:style>
         <p:txBody>
           <a:bodyPr rtlCol="0" anchor="ctr" wrap="square" lIns="175260"/>
           <a:lstStyle/>
@@ -15840,20 +16598,6 @@
           </a:ln>
           <a:effectLst/>
         </p:spPr>
-        <p:style>
-          <a:lnRef idx="1">
-            <a:schemeClr val="accent1"/>
-          </a:lnRef>
-          <a:fillRef idx="3">
-            <a:schemeClr val="accent1"/>
-          </a:fillRef>
-          <a:effectRef idx="2">
-            <a:schemeClr val="accent1"/>
-          </a:effectRef>
-          <a:fontRef idx="minor">
-            <a:schemeClr val="lt1"/>
-          </a:fontRef>
-        </p:style>
         <p:txBody>
           <a:bodyPr rtlCol="0" anchor="ctr"/>
           <a:lstStyle/>
@@ -15884,20 +16628,6 @@
           </a:ln>
           <a:effectLst/>
         </p:spPr>
-        <p:style>
-          <a:lnRef idx="1">
-            <a:schemeClr val="accent1"/>
-          </a:lnRef>
-          <a:fillRef idx="3">
-            <a:schemeClr val="accent1"/>
-          </a:fillRef>
-          <a:effectRef idx="2">
-            <a:schemeClr val="accent1"/>
-          </a:effectRef>
-          <a:fontRef idx="minor">
-            <a:schemeClr val="lt1"/>
-          </a:fontRef>
-        </p:style>
         <p:txBody>
           <a:bodyPr rtlCol="0" anchor="ctr" wrap="square" lIns="175260"/>
           <a:lstStyle/>
@@ -16064,20 +16794,6 @@
           </a:ln>
           <a:effectLst/>
         </p:spPr>
-        <p:style>
-          <a:lnRef idx="1">
-            <a:schemeClr val="accent1"/>
-          </a:lnRef>
-          <a:fillRef idx="3">
-            <a:schemeClr val="accent1"/>
-          </a:fillRef>
-          <a:effectRef idx="2">
-            <a:schemeClr val="accent1"/>
-          </a:effectRef>
-          <a:fontRef idx="minor">
-            <a:schemeClr val="lt1"/>
-          </a:fontRef>
-        </p:style>
         <p:txBody>
           <a:bodyPr rtlCol="0" anchor="ctr"/>
           <a:lstStyle/>
